--- a/3.0_powerbi/module_3_powerbi.pptx
+++ b/3.0_powerbi/module_3_powerbi.pptx
@@ -22,23 +22,29 @@
     <p:sldId id="333" r:id="rId17"/>
     <p:sldId id="334" r:id="rId18"/>
     <p:sldId id="335" r:id="rId19"/>
-    <p:sldId id="336" r:id="rId20"/>
-    <p:sldId id="337" r:id="rId21"/>
-    <p:sldId id="343" r:id="rId22"/>
-    <p:sldId id="324" r:id="rId23"/>
-    <p:sldId id="338" r:id="rId24"/>
-    <p:sldId id="339" r:id="rId25"/>
-    <p:sldId id="355" r:id="rId26"/>
-    <p:sldId id="356" r:id="rId27"/>
-    <p:sldId id="357" r:id="rId28"/>
-    <p:sldId id="358" r:id="rId29"/>
-    <p:sldId id="359" r:id="rId30"/>
-    <p:sldId id="360" r:id="rId31"/>
-    <p:sldId id="362" r:id="rId32"/>
-    <p:sldId id="361" r:id="rId33"/>
-    <p:sldId id="363" r:id="rId34"/>
-    <p:sldId id="364" r:id="rId35"/>
-    <p:sldId id="258" r:id="rId36"/>
+    <p:sldId id="368" r:id="rId20"/>
+    <p:sldId id="369" r:id="rId21"/>
+    <p:sldId id="370" r:id="rId22"/>
+    <p:sldId id="371" r:id="rId23"/>
+    <p:sldId id="372" r:id="rId24"/>
+    <p:sldId id="373" r:id="rId25"/>
+    <p:sldId id="336" r:id="rId26"/>
+    <p:sldId id="337" r:id="rId27"/>
+    <p:sldId id="343" r:id="rId28"/>
+    <p:sldId id="324" r:id="rId29"/>
+    <p:sldId id="338" r:id="rId30"/>
+    <p:sldId id="339" r:id="rId31"/>
+    <p:sldId id="355" r:id="rId32"/>
+    <p:sldId id="356" r:id="rId33"/>
+    <p:sldId id="357" r:id="rId34"/>
+    <p:sldId id="358" r:id="rId35"/>
+    <p:sldId id="359" r:id="rId36"/>
+    <p:sldId id="360" r:id="rId37"/>
+    <p:sldId id="362" r:id="rId38"/>
+    <p:sldId id="361" r:id="rId39"/>
+    <p:sldId id="363" r:id="rId40"/>
+    <p:sldId id="364" r:id="rId41"/>
+    <p:sldId id="258" r:id="rId42"/>
   </p:sldIdLst>
   <p:sldSz cx="12192000" cy="6858000"/>
   <p:notesSz cx="6858000" cy="9144000"/>
@@ -6463,144 +6469,80 @@
         </p:nvSpPr>
         <p:spPr>
           <a:xfrm>
-            <a:off x="346710" y="299085"/>
-            <a:ext cx="5080000" cy="1771015"/>
+            <a:off x="-635" y="904240"/>
+            <a:ext cx="11798935" cy="816610"/>
+          </a:xfrm>
+          <a:prstGeom prst="rect">
+            <a:avLst/>
+          </a:prstGeom>
+          <a:noFill/>
+        </p:spPr>
+        <p:txBody>
+          <a:bodyPr wrap="square" rtlCol="0" anchor="t">
+            <a:noAutofit/>
+          </a:bodyPr>
+          <a:p>
+            <a:r>
+              <a:rPr lang="en-US" altLang="en-US"/>
+              <a:t>https://signup.microsoft.com/get-started/signup?products=53e11149-82f9-4bca-a7f2-8f72592e4f03&amp;mproducts=CFQ7TTC0LCHC%3a0003&amp;fmproducts=CFQ7TTC0LCHC%3a0003&amp;renewalterm=P1Y&amp;renewalbillingterm=P1Y&amp;culture=en-in&amp;country=in&amp;ali=1&amp;bac=1&amp;signedinuser=shasha%40shahil123.onmicrosoft.com </a:t>
+            </a:r>
+            <a:endParaRPr lang="en-US"/>
+          </a:p>
+        </p:txBody>
+      </p:sp>
+      <p:sp>
+        <p:nvSpPr>
+          <p:cNvPr id="3" name="Text Box 2"/>
+          <p:cNvSpPr txBox="1"/>
+          <p:nvPr/>
+        </p:nvSpPr>
+        <p:spPr>
+          <a:xfrm>
+            <a:off x="962025" y="403225"/>
+            <a:ext cx="4064000" cy="368300"/>
+          </a:xfrm>
+          <a:prstGeom prst="rect">
+            <a:avLst/>
+          </a:prstGeom>
+          <a:noFill/>
+        </p:spPr>
+        <p:txBody>
+          <a:bodyPr wrap="square" rtlCol="0">
+            <a:spAutoFit/>
+          </a:bodyPr>
+          <a:p>
+            <a:r>
+              <a:rPr lang="en-US" b="1"/>
+              <a:t>Create a account </a:t>
+            </a:r>
+            <a:endParaRPr lang="en-US" b="1"/>
+          </a:p>
+        </p:txBody>
+      </p:sp>
+      <p:pic>
+        <p:nvPicPr>
+          <p:cNvPr id="4" name="Picture 3"/>
+          <p:cNvPicPr>
+            <a:picLocks noChangeAspect="1"/>
+          </p:cNvPicPr>
+          <p:nvPr/>
+        </p:nvPicPr>
+        <p:blipFill>
+          <a:blip r:embed="rId1"/>
+          <a:stretch>
+            <a:fillRect/>
+          </a:stretch>
+        </p:blipFill>
+        <p:spPr>
+          <a:xfrm>
+            <a:off x="2766060" y="1821815"/>
+            <a:ext cx="8411210" cy="4059555"/>
           </a:xfrm>
           <a:prstGeom prst="rect">
             <a:avLst/>
           </a:prstGeom>
         </p:spPr>
-        <p:txBody>
-          <a:bodyPr>
-            <a:spAutoFit/>
-          </a:bodyPr>
-          <a:p>
-            <a:pPr marL="0" indent="0">
-              <a:spcBef>
-                <a:spcPts val="1000"/>
-              </a:spcBef>
-              <a:spcAft>
-                <a:spcPts val="500"/>
-              </a:spcAft>
-            </a:pPr>
-            <a:r>
-              <a:rPr sz="2500" b="0" i="0">
-                <a:solidFill>
-                  <a:srgbClr val="333333"/>
-                </a:solidFill>
-                <a:latin typeface="Tomorrow"/>
-                <a:ea typeface="Tomorrow"/>
-              </a:rPr>
-              <a:t> </a:t>
-            </a:r>
-            <a:r>
-              <a:rPr sz="2500" b="0" i="0">
-                <a:solidFill>
-                  <a:srgbClr val="1E88E5"/>
-                </a:solidFill>
-                <a:latin typeface="Tomorrow"/>
-                <a:ea typeface="Tomorrow"/>
-                <a:hlinkClick r:id="rId1"/>
-              </a:rPr>
-              <a:t>Case Study/Project</a:t>
-            </a:r>
-            <a:endParaRPr sz="2500" b="0" i="0">
-              <a:solidFill>
-                <a:srgbClr val="1E88E5"/>
-              </a:solidFill>
-              <a:latin typeface="Tomorrow"/>
-              <a:ea typeface="Tomorrow"/>
-              <a:hlinkClick r:id="rId1"/>
-            </a:endParaRPr>
-          </a:p>
-          <a:p>
-            <a:pPr marL="0" indent="0">
-              <a:spcBef>
-                <a:spcPct val="0"/>
-              </a:spcBef>
-              <a:spcAft>
-                <a:spcPct val="0"/>
-              </a:spcAft>
-            </a:pPr>
-            <a:r>
-              <a:rPr sz="1600" b="0" i="0">
-                <a:solidFill>
-                  <a:srgbClr val="333333"/>
-                </a:solidFill>
-                <a:latin typeface="Tomorrow"/>
-                <a:ea typeface="Tomorrow"/>
-              </a:rPr>
-              <a:t> </a:t>
-            </a:r>
-            <a:r>
-              <a:rPr sz="1600" b="0" i="0">
-                <a:solidFill>
-                  <a:srgbClr val="4CAF50"/>
-                </a:solidFill>
-                <a:latin typeface="Tomorrow"/>
-                <a:ea typeface="Tomorrow"/>
-                <a:hlinkClick r:id="rId2" tooltip="Add sub topic content"/>
-              </a:rPr>
-              <a:t>Cricket World Cup Analysis Introducing PowerBI with AI</a:t>
-            </a:r>
-            <a:endParaRPr sz="1600" b="0" i="0">
-              <a:solidFill>
-                <a:srgbClr val="4CAF50"/>
-              </a:solidFill>
-              <a:latin typeface="Tomorrow"/>
-              <a:ea typeface="Tomorrow"/>
-              <a:hlinkClick r:id="rId2" tooltip="Add sub topic content"/>
-            </a:endParaRPr>
-          </a:p>
-          <a:p>
-            <a:pPr marL="0" indent="0">
-              <a:spcBef>
-                <a:spcPct val="0"/>
-              </a:spcBef>
-              <a:spcAft>
-                <a:spcPct val="0"/>
-              </a:spcAft>
-            </a:pPr>
-            <a:endParaRPr sz="1600" b="0" i="0">
-              <a:solidFill>
-                <a:srgbClr val="4CAF50"/>
-              </a:solidFill>
-              <a:latin typeface="Tomorrow"/>
-              <a:ea typeface="Tomorrow"/>
-              <a:hlinkClick r:id="rId2" tooltip="Add sub topic content"/>
-            </a:endParaRPr>
-          </a:p>
-          <a:p>
-            <a:pPr marL="0" indent="0">
-              <a:spcBef>
-                <a:spcPct val="0"/>
-              </a:spcBef>
-              <a:spcAft>
-                <a:spcPct val="0"/>
-              </a:spcAft>
-            </a:pPr>
-            <a:r>
-              <a:rPr sz="1600" b="0" i="0">
-                <a:solidFill>
-                  <a:srgbClr val="4CAF50"/>
-                </a:solidFill>
-                <a:latin typeface="Tomorrow"/>
-                <a:ea typeface="Tomorrow"/>
-                <a:hlinkClick r:id="rId2" tooltip="Add sub topic content"/>
-              </a:rPr>
-              <a:t>https://www.youtube.com/watch?v=YxVnWfY20M0</a:t>
-            </a:r>
-            <a:endParaRPr sz="1600" b="0" i="0">
-              <a:solidFill>
-                <a:srgbClr val="4CAF50"/>
-              </a:solidFill>
-              <a:latin typeface="Tomorrow"/>
-              <a:ea typeface="Tomorrow"/>
-              <a:hlinkClick r:id="rId2" tooltip="Add sub topic content"/>
-            </a:endParaRPr>
-          </a:p>
-        </p:txBody>
-      </p:sp>
+      </p:pic>
     </p:spTree>
   </p:cSld>
   <p:clrMapOvr>
@@ -6619,104 +6561,54 @@
         <p:nvPr/>
       </p:nvGrpSpPr>
       <p:grpSpPr/>
-      <p:sp>
-        <p:nvSpPr>
-          <p:cNvPr id="2" name="Text Box 1"/>
-          <p:cNvSpPr txBox="1"/>
+      <p:pic>
+        <p:nvPicPr>
+          <p:cNvPr id="2" name="Picture 1"/>
+          <p:cNvPicPr>
+            <a:picLocks noChangeAspect="1"/>
+          </p:cNvPicPr>
           <p:nvPr/>
-        </p:nvSpPr>
+        </p:nvPicPr>
+        <p:blipFill>
+          <a:blip r:embed="rId1"/>
+          <a:stretch>
+            <a:fillRect/>
+          </a:stretch>
+        </p:blipFill>
         <p:spPr>
           <a:xfrm>
-            <a:off x="555625" y="445135"/>
-            <a:ext cx="5080000" cy="786130"/>
+            <a:off x="0" y="0"/>
+            <a:ext cx="6752590" cy="5920105"/>
           </a:xfrm>
           <a:prstGeom prst="rect">
             <a:avLst/>
           </a:prstGeom>
         </p:spPr>
-        <p:txBody>
-          <a:bodyPr>
-            <a:spAutoFit/>
-          </a:bodyPr>
-          <a:p>
-            <a:pPr marL="0" indent="0">
-              <a:spcBef>
-                <a:spcPts val="1000"/>
-              </a:spcBef>
-              <a:spcAft>
-                <a:spcPts val="500"/>
-              </a:spcAft>
-            </a:pPr>
-            <a:r>
-              <a:rPr sz="2500" b="0" i="0">
-                <a:solidFill>
-                  <a:srgbClr val="333333"/>
-                </a:solidFill>
-                <a:latin typeface="Tomorrow"/>
-                <a:ea typeface="Tomorrow"/>
-              </a:rPr>
-              <a:t> </a:t>
-            </a:r>
-            <a:r>
-              <a:rPr sz="2500" b="0" i="0">
-                <a:solidFill>
-                  <a:srgbClr val="1E88E5"/>
-                </a:solidFill>
-                <a:latin typeface="Tomorrow"/>
-                <a:ea typeface="Tomorrow"/>
-                <a:hlinkClick r:id="rId1"/>
-              </a:rPr>
-              <a:t>Case Study/Project</a:t>
-            </a:r>
-            <a:endParaRPr sz="2500" b="0" i="0">
-              <a:solidFill>
-                <a:srgbClr val="1E88E5"/>
-              </a:solidFill>
-              <a:latin typeface="Tomorrow"/>
-              <a:ea typeface="Tomorrow"/>
-              <a:hlinkClick r:id="rId1"/>
-            </a:endParaRPr>
-          </a:p>
-          <a:p>
-            <a:pPr marL="0" indent="0">
-              <a:spcBef>
-                <a:spcPct val="0"/>
-              </a:spcBef>
-              <a:spcAft>
-                <a:spcPct val="0"/>
-              </a:spcAft>
-            </a:pPr>
-            <a:r>
-              <a:rPr sz="1600" b="0" i="0">
-                <a:solidFill>
-                  <a:srgbClr val="333333"/>
-                </a:solidFill>
-                <a:latin typeface="Tomorrow"/>
-                <a:ea typeface="Tomorrow"/>
-              </a:rPr>
-              <a:t> </a:t>
-            </a:r>
-            <a:r>
-              <a:rPr lang="en-US" sz="1600" b="0" i="0">
-                <a:solidFill>
-                  <a:srgbClr val="333333"/>
-                </a:solidFill>
-                <a:latin typeface="Tomorrow"/>
-                <a:ea typeface="Tomorrow"/>
-              </a:rPr>
-              <a:t>CAR SALES PROJECT</a:t>
-            </a:r>
-            <a:endParaRPr lang="en-US" sz="1600" b="0" i="0">
-              <a:solidFill>
-                <a:srgbClr val="333333"/>
-              </a:solidFill>
-              <a:latin typeface="Tomorrow"/>
-              <a:ea typeface="Tomorrow"/>
-              <a:hlinkClick r:id="rId2" tooltip="Add sub topic content"/>
-            </a:endParaRPr>
-          </a:p>
-        </p:txBody>
-      </p:sp>
+      </p:pic>
+      <p:pic>
+        <p:nvPicPr>
+          <p:cNvPr id="3" name="Picture 2"/>
+          <p:cNvPicPr>
+            <a:picLocks noChangeAspect="1"/>
+          </p:cNvPicPr>
+          <p:nvPr/>
+        </p:nvPicPr>
+        <p:blipFill>
+          <a:blip r:embed="rId2"/>
+          <a:stretch>
+            <a:fillRect/>
+          </a:stretch>
+        </p:blipFill>
+        <p:spPr>
+          <a:xfrm>
+            <a:off x="7148830" y="1744345"/>
+            <a:ext cx="4819650" cy="2857500"/>
+          </a:xfrm>
+          <a:prstGeom prst="rect">
+            <a:avLst/>
+          </a:prstGeom>
+        </p:spPr>
+      </p:pic>
     </p:spTree>
   </p:cSld>
   <p:clrMapOvr>
@@ -6861,6 +6753,531 @@
         <p:nvPr/>
       </p:nvGrpSpPr>
       <p:grpSpPr/>
+      <p:pic>
+        <p:nvPicPr>
+          <p:cNvPr id="2" name="Picture 1"/>
+          <p:cNvPicPr>
+            <a:picLocks noChangeAspect="1"/>
+          </p:cNvPicPr>
+          <p:nvPr/>
+        </p:nvPicPr>
+        <p:blipFill>
+          <a:blip r:embed="rId1"/>
+          <a:stretch>
+            <a:fillRect/>
+          </a:stretch>
+        </p:blipFill>
+        <p:spPr>
+          <a:xfrm>
+            <a:off x="161290" y="0"/>
+            <a:ext cx="4486275" cy="2105025"/>
+          </a:xfrm>
+          <a:prstGeom prst="rect">
+            <a:avLst/>
+          </a:prstGeom>
+        </p:spPr>
+      </p:pic>
+      <p:pic>
+        <p:nvPicPr>
+          <p:cNvPr id="4" name="Picture 3"/>
+          <p:cNvPicPr>
+            <a:picLocks noChangeAspect="1"/>
+          </p:cNvPicPr>
+          <p:nvPr/>
+        </p:nvPicPr>
+        <p:blipFill>
+          <a:blip r:embed="rId2"/>
+          <a:stretch>
+            <a:fillRect/>
+          </a:stretch>
+        </p:blipFill>
+        <p:spPr>
+          <a:xfrm>
+            <a:off x="4380865" y="0"/>
+            <a:ext cx="5019675" cy="5324475"/>
+          </a:xfrm>
+          <a:prstGeom prst="rect">
+            <a:avLst/>
+          </a:prstGeom>
+        </p:spPr>
+      </p:pic>
+    </p:spTree>
+  </p:cSld>
+  <p:clrMapOvr>
+    <a:masterClrMapping/>
+  </p:clrMapOvr>
+</p:sld>
+</file>
+
+<file path=ppt/slides/slide21.xml><?xml version="1.0" encoding="utf-8"?>
+<p:sld xmlns:a="http://schemas.openxmlformats.org/drawingml/2006/main" xmlns:r="http://schemas.openxmlformats.org/officeDocument/2006/relationships" xmlns:p="http://schemas.openxmlformats.org/presentationml/2006/main">
+  <p:cSld>
+    <p:spTree>
+      <p:nvGrpSpPr>
+        <p:cNvPr id="1" name=""/>
+        <p:cNvGrpSpPr/>
+        <p:nvPr/>
+      </p:nvGrpSpPr>
+      <p:grpSpPr/>
+      <p:pic>
+        <p:nvPicPr>
+          <p:cNvPr id="2" name="Picture 1"/>
+          <p:cNvPicPr>
+            <a:picLocks noChangeAspect="1"/>
+          </p:cNvPicPr>
+          <p:nvPr/>
+        </p:nvPicPr>
+        <p:blipFill>
+          <a:blip r:embed="rId1"/>
+          <a:stretch>
+            <a:fillRect/>
+          </a:stretch>
+        </p:blipFill>
+        <p:spPr>
+          <a:xfrm>
+            <a:off x="0" y="0"/>
+            <a:ext cx="4343400" cy="5000625"/>
+          </a:xfrm>
+          <a:prstGeom prst="rect">
+            <a:avLst/>
+          </a:prstGeom>
+        </p:spPr>
+      </p:pic>
+      <p:pic>
+        <p:nvPicPr>
+          <p:cNvPr id="3" name="Picture 2"/>
+          <p:cNvPicPr>
+            <a:picLocks noChangeAspect="1"/>
+          </p:cNvPicPr>
+          <p:nvPr/>
+        </p:nvPicPr>
+        <p:blipFill>
+          <a:blip r:embed="rId2"/>
+          <a:stretch>
+            <a:fillRect/>
+          </a:stretch>
+        </p:blipFill>
+        <p:spPr>
+          <a:xfrm>
+            <a:off x="4343400" y="0"/>
+            <a:ext cx="5010150" cy="2905125"/>
+          </a:xfrm>
+          <a:prstGeom prst="rect">
+            <a:avLst/>
+          </a:prstGeom>
+        </p:spPr>
+      </p:pic>
+      <p:pic>
+        <p:nvPicPr>
+          <p:cNvPr id="4" name="Picture 3"/>
+          <p:cNvPicPr>
+            <a:picLocks noChangeAspect="1"/>
+          </p:cNvPicPr>
+          <p:nvPr/>
+        </p:nvPicPr>
+        <p:blipFill>
+          <a:blip r:embed="rId3"/>
+          <a:stretch>
+            <a:fillRect/>
+          </a:stretch>
+        </p:blipFill>
+        <p:spPr>
+          <a:xfrm>
+            <a:off x="5996305" y="2905125"/>
+            <a:ext cx="5238750" cy="3048000"/>
+          </a:xfrm>
+          <a:prstGeom prst="rect">
+            <a:avLst/>
+          </a:prstGeom>
+        </p:spPr>
+      </p:pic>
+    </p:spTree>
+  </p:cSld>
+  <p:clrMapOvr>
+    <a:masterClrMapping/>
+  </p:clrMapOvr>
+</p:sld>
+</file>
+
+<file path=ppt/slides/slide22.xml><?xml version="1.0" encoding="utf-8"?>
+<p:sld xmlns:a="http://schemas.openxmlformats.org/drawingml/2006/main" xmlns:r="http://schemas.openxmlformats.org/officeDocument/2006/relationships" xmlns:p="http://schemas.openxmlformats.org/presentationml/2006/main">
+  <p:cSld>
+    <p:spTree>
+      <p:nvGrpSpPr>
+        <p:cNvPr id="1" name=""/>
+        <p:cNvGrpSpPr/>
+        <p:nvPr/>
+      </p:nvGrpSpPr>
+      <p:grpSpPr/>
+      <p:pic>
+        <p:nvPicPr>
+          <p:cNvPr id="2" name="Picture 1"/>
+          <p:cNvPicPr>
+            <a:picLocks noChangeAspect="1"/>
+          </p:cNvPicPr>
+          <p:nvPr/>
+        </p:nvPicPr>
+        <p:blipFill>
+          <a:blip r:embed="rId1"/>
+          <a:stretch>
+            <a:fillRect/>
+          </a:stretch>
+        </p:blipFill>
+        <p:spPr>
+          <a:xfrm>
+            <a:off x="788670" y="-521335"/>
+            <a:ext cx="7745730" cy="6943725"/>
+          </a:xfrm>
+          <a:prstGeom prst="rect">
+            <a:avLst/>
+          </a:prstGeom>
+        </p:spPr>
+      </p:pic>
+    </p:spTree>
+  </p:cSld>
+  <p:clrMapOvr>
+    <a:masterClrMapping/>
+  </p:clrMapOvr>
+</p:sld>
+</file>
+
+<file path=ppt/slides/slide23.xml><?xml version="1.0" encoding="utf-8"?>
+<p:sld xmlns:a="http://schemas.openxmlformats.org/drawingml/2006/main" xmlns:r="http://schemas.openxmlformats.org/officeDocument/2006/relationships" xmlns:p="http://schemas.openxmlformats.org/presentationml/2006/main">
+  <p:cSld>
+    <p:spTree>
+      <p:nvGrpSpPr>
+        <p:cNvPr id="1" name=""/>
+        <p:cNvGrpSpPr/>
+        <p:nvPr/>
+      </p:nvGrpSpPr>
+      <p:grpSpPr/>
+      <p:sp>
+        <p:nvSpPr>
+          <p:cNvPr id="2" name="Text Box 1"/>
+          <p:cNvSpPr txBox="1"/>
+          <p:nvPr/>
+        </p:nvSpPr>
+        <p:spPr>
+          <a:xfrm>
+            <a:off x="3048000" y="3106420"/>
+            <a:ext cx="6096000" cy="645160"/>
+          </a:xfrm>
+          <a:prstGeom prst="rect">
+            <a:avLst/>
+          </a:prstGeom>
+          <a:noFill/>
+        </p:spPr>
+        <p:txBody>
+          <a:bodyPr wrap="square" rtlCol="0" anchor="t">
+            <a:spAutoFit/>
+          </a:bodyPr>
+          <a:p>
+            <a:r>
+              <a:rPr lang="en-US" altLang="en-US"/>
+              <a:t>https://app.powerbi.com/singleSignOn?ru=https%3A%2F%2Fapp.powerbi.com%2F%3FnoSignUpCheck%3D1</a:t>
+            </a:r>
+            <a:endParaRPr lang="en-US"/>
+          </a:p>
+        </p:txBody>
+      </p:sp>
+    </p:spTree>
+  </p:cSld>
+  <p:clrMapOvr>
+    <a:masterClrMapping/>
+  </p:clrMapOvr>
+</p:sld>
+</file>
+
+<file path=ppt/slides/slide24.xml><?xml version="1.0" encoding="utf-8"?>
+<p:sld xmlns:a="http://schemas.openxmlformats.org/drawingml/2006/main" xmlns:r="http://schemas.openxmlformats.org/officeDocument/2006/relationships" xmlns:p="http://schemas.openxmlformats.org/presentationml/2006/main">
+  <p:cSld>
+    <p:spTree>
+      <p:nvGrpSpPr>
+        <p:cNvPr id="1" name=""/>
+        <p:cNvGrpSpPr/>
+        <p:nvPr/>
+      </p:nvGrpSpPr>
+      <p:grpSpPr/>
+      <p:sp>
+        <p:nvSpPr>
+          <p:cNvPr id="2" name="Text Box 1"/>
+          <p:cNvSpPr txBox="1"/>
+          <p:nvPr/>
+        </p:nvSpPr>
+        <p:spPr>
+          <a:xfrm>
+            <a:off x="346710" y="299085"/>
+            <a:ext cx="5080000" cy="1771015"/>
+          </a:xfrm>
+          <a:prstGeom prst="rect">
+            <a:avLst/>
+          </a:prstGeom>
+        </p:spPr>
+        <p:txBody>
+          <a:bodyPr>
+            <a:spAutoFit/>
+          </a:bodyPr>
+          <a:p>
+            <a:pPr marL="0" indent="0">
+              <a:spcBef>
+                <a:spcPts val="1000"/>
+              </a:spcBef>
+              <a:spcAft>
+                <a:spcPts val="500"/>
+              </a:spcAft>
+            </a:pPr>
+            <a:r>
+              <a:rPr sz="2500" b="0" i="0">
+                <a:solidFill>
+                  <a:srgbClr val="333333"/>
+                </a:solidFill>
+                <a:latin typeface="Tomorrow"/>
+                <a:ea typeface="Tomorrow"/>
+              </a:rPr>
+              <a:t> </a:t>
+            </a:r>
+            <a:r>
+              <a:rPr sz="2500" b="0" i="0">
+                <a:solidFill>
+                  <a:srgbClr val="1E88E5"/>
+                </a:solidFill>
+                <a:latin typeface="Tomorrow"/>
+                <a:ea typeface="Tomorrow"/>
+                <a:hlinkClick r:id="rId1"/>
+              </a:rPr>
+              <a:t>Case Study/Project</a:t>
+            </a:r>
+            <a:endParaRPr sz="2500" b="0" i="0">
+              <a:solidFill>
+                <a:srgbClr val="1E88E5"/>
+              </a:solidFill>
+              <a:latin typeface="Tomorrow"/>
+              <a:ea typeface="Tomorrow"/>
+              <a:hlinkClick r:id="rId1"/>
+            </a:endParaRPr>
+          </a:p>
+          <a:p>
+            <a:pPr marL="0" indent="0">
+              <a:spcBef>
+                <a:spcPct val="0"/>
+              </a:spcBef>
+              <a:spcAft>
+                <a:spcPct val="0"/>
+              </a:spcAft>
+            </a:pPr>
+            <a:r>
+              <a:rPr sz="1600" b="0" i="0">
+                <a:solidFill>
+                  <a:srgbClr val="333333"/>
+                </a:solidFill>
+                <a:latin typeface="Tomorrow"/>
+                <a:ea typeface="Tomorrow"/>
+              </a:rPr>
+              <a:t> </a:t>
+            </a:r>
+            <a:r>
+              <a:rPr sz="1600" b="0" i="0">
+                <a:solidFill>
+                  <a:srgbClr val="4CAF50"/>
+                </a:solidFill>
+                <a:latin typeface="Tomorrow"/>
+                <a:ea typeface="Tomorrow"/>
+                <a:hlinkClick r:id="rId2" tooltip="Add sub topic content"/>
+              </a:rPr>
+              <a:t>Cricket World Cup Analysis Introducing PowerBI with AI</a:t>
+            </a:r>
+            <a:endParaRPr sz="1600" b="0" i="0">
+              <a:solidFill>
+                <a:srgbClr val="4CAF50"/>
+              </a:solidFill>
+              <a:latin typeface="Tomorrow"/>
+              <a:ea typeface="Tomorrow"/>
+              <a:hlinkClick r:id="rId2" tooltip="Add sub topic content"/>
+            </a:endParaRPr>
+          </a:p>
+          <a:p>
+            <a:pPr marL="0" indent="0">
+              <a:spcBef>
+                <a:spcPct val="0"/>
+              </a:spcBef>
+              <a:spcAft>
+                <a:spcPct val="0"/>
+              </a:spcAft>
+            </a:pPr>
+            <a:endParaRPr sz="1600" b="0" i="0">
+              <a:solidFill>
+                <a:srgbClr val="4CAF50"/>
+              </a:solidFill>
+              <a:latin typeface="Tomorrow"/>
+              <a:ea typeface="Tomorrow"/>
+              <a:hlinkClick r:id="rId2" tooltip="Add sub topic content"/>
+            </a:endParaRPr>
+          </a:p>
+          <a:p>
+            <a:pPr marL="0" indent="0">
+              <a:spcBef>
+                <a:spcPct val="0"/>
+              </a:spcBef>
+              <a:spcAft>
+                <a:spcPct val="0"/>
+              </a:spcAft>
+            </a:pPr>
+            <a:r>
+              <a:rPr sz="1600" b="0" i="0">
+                <a:solidFill>
+                  <a:srgbClr val="4CAF50"/>
+                </a:solidFill>
+                <a:latin typeface="Tomorrow"/>
+                <a:ea typeface="Tomorrow"/>
+                <a:hlinkClick r:id="rId2" tooltip="Add sub topic content"/>
+              </a:rPr>
+              <a:t>https://www.youtube.com/watch?v=YxVnWfY20M0</a:t>
+            </a:r>
+            <a:endParaRPr sz="1600" b="0" i="0">
+              <a:solidFill>
+                <a:srgbClr val="4CAF50"/>
+              </a:solidFill>
+              <a:latin typeface="Tomorrow"/>
+              <a:ea typeface="Tomorrow"/>
+              <a:hlinkClick r:id="rId2" tooltip="Add sub topic content"/>
+            </a:endParaRPr>
+          </a:p>
+        </p:txBody>
+      </p:sp>
+    </p:spTree>
+  </p:cSld>
+  <p:clrMapOvr>
+    <a:masterClrMapping/>
+  </p:clrMapOvr>
+</p:sld>
+</file>
+
+<file path=ppt/slides/slide25.xml><?xml version="1.0" encoding="utf-8"?>
+<p:sld xmlns:a="http://schemas.openxmlformats.org/drawingml/2006/main" xmlns:r="http://schemas.openxmlformats.org/officeDocument/2006/relationships" xmlns:p="http://schemas.openxmlformats.org/presentationml/2006/main">
+  <p:cSld>
+    <p:spTree>
+      <p:nvGrpSpPr>
+        <p:cNvPr id="1" name=""/>
+        <p:cNvGrpSpPr/>
+        <p:nvPr/>
+      </p:nvGrpSpPr>
+      <p:grpSpPr/>
+      <p:sp>
+        <p:nvSpPr>
+          <p:cNvPr id="2" name="Text Box 1"/>
+          <p:cNvSpPr txBox="1"/>
+          <p:nvPr/>
+        </p:nvSpPr>
+        <p:spPr>
+          <a:xfrm>
+            <a:off x="555625" y="445135"/>
+            <a:ext cx="5080000" cy="786130"/>
+          </a:xfrm>
+          <a:prstGeom prst="rect">
+            <a:avLst/>
+          </a:prstGeom>
+        </p:spPr>
+        <p:txBody>
+          <a:bodyPr>
+            <a:spAutoFit/>
+          </a:bodyPr>
+          <a:p>
+            <a:pPr marL="0" indent="0">
+              <a:spcBef>
+                <a:spcPts val="1000"/>
+              </a:spcBef>
+              <a:spcAft>
+                <a:spcPts val="500"/>
+              </a:spcAft>
+            </a:pPr>
+            <a:r>
+              <a:rPr sz="2500" b="0" i="0">
+                <a:solidFill>
+                  <a:srgbClr val="333333"/>
+                </a:solidFill>
+                <a:latin typeface="Tomorrow"/>
+                <a:ea typeface="Tomorrow"/>
+              </a:rPr>
+              <a:t> </a:t>
+            </a:r>
+            <a:r>
+              <a:rPr sz="2500" b="0" i="0">
+                <a:solidFill>
+                  <a:srgbClr val="1E88E5"/>
+                </a:solidFill>
+                <a:latin typeface="Tomorrow"/>
+                <a:ea typeface="Tomorrow"/>
+                <a:hlinkClick r:id="rId1"/>
+              </a:rPr>
+              <a:t>Case Study/Project</a:t>
+            </a:r>
+            <a:endParaRPr sz="2500" b="0" i="0">
+              <a:solidFill>
+                <a:srgbClr val="1E88E5"/>
+              </a:solidFill>
+              <a:latin typeface="Tomorrow"/>
+              <a:ea typeface="Tomorrow"/>
+              <a:hlinkClick r:id="rId1"/>
+            </a:endParaRPr>
+          </a:p>
+          <a:p>
+            <a:pPr marL="0" indent="0">
+              <a:spcBef>
+                <a:spcPct val="0"/>
+              </a:spcBef>
+              <a:spcAft>
+                <a:spcPct val="0"/>
+              </a:spcAft>
+            </a:pPr>
+            <a:r>
+              <a:rPr sz="1600" b="0" i="0">
+                <a:solidFill>
+                  <a:srgbClr val="333333"/>
+                </a:solidFill>
+                <a:latin typeface="Tomorrow"/>
+                <a:ea typeface="Tomorrow"/>
+              </a:rPr>
+              <a:t> </a:t>
+            </a:r>
+            <a:r>
+              <a:rPr lang="en-US" sz="1600" b="0" i="0">
+                <a:solidFill>
+                  <a:srgbClr val="333333"/>
+                </a:solidFill>
+                <a:latin typeface="Tomorrow"/>
+                <a:ea typeface="Tomorrow"/>
+              </a:rPr>
+              <a:t>CAR SALES PROJECT</a:t>
+            </a:r>
+            <a:endParaRPr lang="en-US" sz="1600" b="0" i="0">
+              <a:solidFill>
+                <a:srgbClr val="333333"/>
+              </a:solidFill>
+              <a:latin typeface="Tomorrow"/>
+              <a:ea typeface="Tomorrow"/>
+              <a:hlinkClick r:id="rId2" tooltip="Add sub topic content"/>
+            </a:endParaRPr>
+          </a:p>
+        </p:txBody>
+      </p:sp>
+    </p:spTree>
+  </p:cSld>
+  <p:clrMapOvr>
+    <a:masterClrMapping/>
+  </p:clrMapOvr>
+</p:sld>
+</file>
+
+<file path=ppt/slides/slide26.xml><?xml version="1.0" encoding="utf-8"?>
+<p:sld xmlns:a="http://schemas.openxmlformats.org/drawingml/2006/main" xmlns:r="http://schemas.openxmlformats.org/officeDocument/2006/relationships" xmlns:p="http://schemas.openxmlformats.org/presentationml/2006/main">
+  <p:cSld>
+    <p:spTree>
+      <p:nvGrpSpPr>
+        <p:cNvPr id="1" name=""/>
+        <p:cNvGrpSpPr/>
+        <p:nvPr/>
+      </p:nvGrpSpPr>
+      <p:grpSpPr/>
       <p:sp>
         <p:nvSpPr>
           <p:cNvPr id="2" name="Text Box 1"/>
@@ -7133,7 +7550,7 @@
 </p:sld>
 </file>
 
-<file path=ppt/slides/slide21.xml><?xml version="1.0" encoding="utf-8"?>
+<file path=ppt/slides/slide27.xml><?xml version="1.0" encoding="utf-8"?>
 <p:sld xmlns:a="http://schemas.openxmlformats.org/drawingml/2006/main" xmlns:r="http://schemas.openxmlformats.org/officeDocument/2006/relationships" xmlns:p="http://schemas.openxmlformats.org/presentationml/2006/main">
   <p:cSld>
     <p:spTree>
@@ -7416,7 +7833,7 @@
 </p:sld>
 </file>
 
-<file path=ppt/slides/slide22.xml><?xml version="1.0" encoding="utf-8"?>
+<file path=ppt/slides/slide28.xml><?xml version="1.0" encoding="utf-8"?>
 <p:sld xmlns:a="http://schemas.openxmlformats.org/drawingml/2006/main" xmlns:r="http://schemas.openxmlformats.org/officeDocument/2006/relationships" xmlns:p="http://schemas.openxmlformats.org/presentationml/2006/main">
   <p:cSld>
     <p:spTree>
@@ -7809,7 +8226,7 @@
 </p:sld>
 </file>
 
-<file path=ppt/slides/slide23.xml><?xml version="1.0" encoding="utf-8"?>
+<file path=ppt/slides/slide29.xml><?xml version="1.0" encoding="utf-8"?>
 <p:sld xmlns:a="http://schemas.openxmlformats.org/drawingml/2006/main" xmlns:r="http://schemas.openxmlformats.org/officeDocument/2006/relationships" xmlns:p="http://schemas.openxmlformats.org/presentationml/2006/main">
   <p:cSld>
     <p:spTree>
@@ -8348,1988 +8765,6 @@
               <a:latin typeface="Segoe MDL2 Assets" panose="050A0102010101010101"/>
               <a:ea typeface="Calibri" panose="020F0502020204030204"/>
               <a:sym typeface="+mn-ea"/>
-            </a:endParaRPr>
-          </a:p>
-        </p:txBody>
-      </p:sp>
-    </p:spTree>
-  </p:cSld>
-  <p:clrMapOvr>
-    <a:masterClrMapping/>
-  </p:clrMapOvr>
-</p:sld>
-</file>
-
-<file path=ppt/slides/slide24.xml><?xml version="1.0" encoding="utf-8"?>
-<p:sld xmlns:a="http://schemas.openxmlformats.org/drawingml/2006/main" xmlns:r="http://schemas.openxmlformats.org/officeDocument/2006/relationships" xmlns:p="http://schemas.openxmlformats.org/presentationml/2006/main">
-  <p:cSld>
-    <p:spTree>
-      <p:nvGrpSpPr>
-        <p:cNvPr id="1" name=""/>
-        <p:cNvGrpSpPr/>
-        <p:nvPr/>
-      </p:nvGrpSpPr>
-      <p:grpSpPr/>
-      <p:sp>
-        <p:nvSpPr>
-          <p:cNvPr id="3" name="Text Box 2"/>
-          <p:cNvSpPr txBox="1"/>
-          <p:nvPr/>
-        </p:nvSpPr>
-        <p:spPr>
-          <a:xfrm>
-            <a:off x="444500" y="113665"/>
-            <a:ext cx="9356725" cy="1137285"/>
-          </a:xfrm>
-          <a:prstGeom prst="rect">
-            <a:avLst/>
-          </a:prstGeom>
-        </p:spPr>
-        <p:txBody>
-          <a:bodyPr wrap="square">
-            <a:spAutoFit/>
-          </a:bodyPr>
-          <a:p>
-            <a:pPr marL="0" indent="0"/>
-            <a:r>
-              <a:rPr sz="2000" b="1" i="0">
-                <a:solidFill>
-                  <a:srgbClr val="001D35"/>
-                </a:solidFill>
-                <a:latin typeface="Google Sans"/>
-                <a:ea typeface="Google Sans"/>
-              </a:rPr>
-              <a:t>Row-Level Security (RLS)</a:t>
-            </a:r>
-            <a:r>
-              <a:rPr sz="1600" b="0" i="0">
-                <a:solidFill>
-                  <a:srgbClr val="001D35"/>
-                </a:solidFill>
-                <a:latin typeface="Google Sans"/>
-                <a:ea typeface="Google Sans"/>
-              </a:rPr>
-              <a:t> in Power BI allows you to restrict data access at the row level, ensuring that users only see the data they are authorized to view, based on their roles or permissions. You can define roles and rules within Power BI Desktop and publish them to the Power BI service to configure RLS. </a:t>
-            </a:r>
-            <a:endParaRPr sz="1600" b="0" i="0">
-              <a:solidFill>
-                <a:srgbClr val="001D35"/>
-              </a:solidFill>
-              <a:latin typeface="Google Sans"/>
-              <a:ea typeface="Google Sans"/>
-            </a:endParaRPr>
-          </a:p>
-        </p:txBody>
-      </p:sp>
-      <p:sp>
-        <p:nvSpPr>
-          <p:cNvPr id="4" name="Text Box 3"/>
-          <p:cNvSpPr txBox="1"/>
-          <p:nvPr/>
-        </p:nvSpPr>
-        <p:spPr>
-          <a:xfrm>
-            <a:off x="444500" y="1250950"/>
-            <a:ext cx="10919460" cy="4730750"/>
-          </a:xfrm>
-          <a:prstGeom prst="rect">
-            <a:avLst/>
-          </a:prstGeom>
-        </p:spPr>
-        <p:txBody>
-          <a:bodyPr wrap="square">
-            <a:spAutoFit/>
-          </a:bodyPr>
-          <a:p>
-            <a:pPr marL="0" indent="0">
-              <a:spcBef>
-                <a:spcPts val="1000"/>
-              </a:spcBef>
-              <a:spcAft>
-                <a:spcPts val="500"/>
-              </a:spcAft>
-            </a:pPr>
-            <a:r>
-              <a:rPr b="1" i="0">
-                <a:solidFill>
-                  <a:srgbClr val="001D35"/>
-                </a:solidFill>
-                <a:latin typeface="Google Sans"/>
-                <a:ea typeface="Google Sans"/>
-              </a:rPr>
-              <a:t>How to Implement RLS in Power BI:</a:t>
-            </a:r>
-            <a:endParaRPr b="1" i="0">
-              <a:solidFill>
-                <a:srgbClr val="001D35"/>
-              </a:solidFill>
-              <a:latin typeface="Google Sans"/>
-              <a:ea typeface="Google Sans"/>
-            </a:endParaRPr>
-          </a:p>
-          <a:p>
-            <a:pPr marL="0" indent="0">
-              <a:spcBef>
-                <a:spcPct val="0"/>
-              </a:spcBef>
-              <a:spcAft>
-                <a:spcPts val="400"/>
-              </a:spcAft>
-              <a:buAutoNum type="arabicPeriod"/>
-            </a:pPr>
-            <a:r>
-              <a:rPr sz="1600" b="0" i="0">
-                <a:solidFill>
-                  <a:srgbClr val="001D35"/>
-                </a:solidFill>
-                <a:latin typeface="Google Sans"/>
-                <a:ea typeface="Google Sans"/>
-              </a:rPr>
-              <a:t>Define Roles and Rules in Power BI Desktop:</a:t>
-            </a:r>
-            <a:endParaRPr sz="1600" b="0" i="0">
-              <a:solidFill>
-                <a:srgbClr val="001D35"/>
-              </a:solidFill>
-              <a:latin typeface="Google Sans"/>
-              <a:ea typeface="Google Sans"/>
-            </a:endParaRPr>
-          </a:p>
-          <a:p>
-            <a:pPr marL="0" lvl="1" indent="0">
-              <a:spcBef>
-                <a:spcPct val="0"/>
-              </a:spcBef>
-              <a:spcAft>
-                <a:spcPts val="400"/>
-              </a:spcAft>
-              <a:buFont typeface="Arial" panose="020B0604020202020204"/>
-              <a:buChar char="◦"/>
-            </a:pPr>
-            <a:r>
-              <a:rPr sz="1600" b="0" i="0">
-                <a:solidFill>
-                  <a:srgbClr val="001D35"/>
-                </a:solidFill>
-                <a:latin typeface="Google Sans"/>
-                <a:ea typeface="Google Sans"/>
-              </a:rPr>
-              <a:t>Create Roles: In the Power BI Desktop modeling view, go to "Manage Roles" and create the necessary roles. </a:t>
-            </a:r>
-            <a:endParaRPr sz="1600" b="0" i="0">
-              <a:solidFill>
-                <a:srgbClr val="001D35"/>
-              </a:solidFill>
-              <a:latin typeface="Google Sans"/>
-              <a:ea typeface="Google Sans"/>
-            </a:endParaRPr>
-          </a:p>
-          <a:p>
-            <a:pPr marL="0" lvl="1" indent="0">
-              <a:spcBef>
-                <a:spcPct val="0"/>
-              </a:spcBef>
-              <a:spcAft>
-                <a:spcPts val="400"/>
-              </a:spcAft>
-              <a:buFont typeface="Arial" panose="020B0604020202020204"/>
-              <a:buChar char="◦"/>
-            </a:pPr>
-            <a:r>
-              <a:rPr sz="1600" b="0" i="0">
-                <a:solidFill>
-                  <a:srgbClr val="001D35"/>
-                </a:solidFill>
-                <a:latin typeface="Google Sans"/>
-                <a:ea typeface="Google Sans"/>
-              </a:rPr>
-              <a:t>Define DAX Expressions: For each role, define a DAX expression (Data Analysis Expressions) that filters the data based on the role's requirements. </a:t>
-            </a:r>
-            <a:endParaRPr sz="1600" b="0" i="0">
-              <a:solidFill>
-                <a:srgbClr val="001D35"/>
-              </a:solidFill>
-              <a:latin typeface="Google Sans"/>
-              <a:ea typeface="Google Sans"/>
-            </a:endParaRPr>
-          </a:p>
-          <a:p>
-            <a:pPr marL="0" lvl="1" indent="0">
-              <a:spcBef>
-                <a:spcPct val="0"/>
-              </a:spcBef>
-              <a:spcAft>
-                <a:spcPct val="0"/>
-              </a:spcAft>
-              <a:buFont typeface="Arial" panose="020B0604020202020204"/>
-              <a:buChar char="◦"/>
-            </a:pPr>
-            <a:r>
-              <a:rPr sz="1600" b="0" i="0">
-                <a:solidFill>
-                  <a:srgbClr val="001D35"/>
-                </a:solidFill>
-                <a:latin typeface="Google Sans"/>
-                <a:ea typeface="Google Sans"/>
-              </a:rPr>
-              <a:t>Example: A DAX expression could check the "Region" column and only show data for the current user's region. </a:t>
-            </a:r>
-            <a:endParaRPr sz="1600" b="0" i="0">
-              <a:solidFill>
-                <a:srgbClr val="001D35"/>
-              </a:solidFill>
-              <a:latin typeface="Google Sans"/>
-              <a:ea typeface="Google Sans"/>
-            </a:endParaRPr>
-          </a:p>
-          <a:p>
-            <a:pPr marL="0" indent="0">
-              <a:spcBef>
-                <a:spcPct val="0"/>
-              </a:spcBef>
-              <a:spcAft>
-                <a:spcPts val="400"/>
-              </a:spcAft>
-              <a:buAutoNum type="arabicPeriod"/>
-            </a:pPr>
-            <a:r>
-              <a:rPr sz="1600" b="0" i="0">
-                <a:solidFill>
-                  <a:srgbClr val="001D35"/>
-                </a:solidFill>
-                <a:latin typeface="Google Sans"/>
-                <a:ea typeface="Google Sans"/>
-              </a:rPr>
-              <a:t>Publish to Power BI Service:</a:t>
-            </a:r>
-            <a:endParaRPr sz="1600" b="0" i="0">
-              <a:solidFill>
-                <a:srgbClr val="001D35"/>
-              </a:solidFill>
-              <a:latin typeface="Google Sans"/>
-              <a:ea typeface="Google Sans"/>
-            </a:endParaRPr>
-          </a:p>
-          <a:p>
-            <a:pPr marL="0" lvl="1" indent="0">
-              <a:spcBef>
-                <a:spcPct val="0"/>
-              </a:spcBef>
-              <a:spcAft>
-                <a:spcPts val="400"/>
-              </a:spcAft>
-              <a:buFont typeface="Arial" panose="020B0604020202020204"/>
-              <a:buChar char="◦"/>
-            </a:pPr>
-            <a:r>
-              <a:rPr sz="1600" b="0" i="0">
-                <a:solidFill>
-                  <a:srgbClr val="001D35"/>
-                </a:solidFill>
-                <a:latin typeface="Google Sans"/>
-                <a:ea typeface="Google Sans"/>
-              </a:rPr>
-              <a:t>Publish your Power BI report to the Power BI service. </a:t>
-            </a:r>
-            <a:endParaRPr sz="1600" b="0" i="0">
-              <a:solidFill>
-                <a:srgbClr val="001D35"/>
-              </a:solidFill>
-              <a:latin typeface="Google Sans"/>
-              <a:ea typeface="Google Sans"/>
-            </a:endParaRPr>
-          </a:p>
-          <a:p>
-            <a:pPr marL="0" lvl="1" indent="0">
-              <a:spcBef>
-                <a:spcPct val="0"/>
-              </a:spcBef>
-              <a:spcAft>
-                <a:spcPct val="0"/>
-              </a:spcAft>
-              <a:buFont typeface="Arial" panose="020B0604020202020204"/>
-              <a:buChar char="◦"/>
-            </a:pPr>
-            <a:r>
-              <a:rPr sz="1600" b="0" i="0">
-                <a:solidFill>
-                  <a:srgbClr val="001D35"/>
-                </a:solidFill>
-                <a:latin typeface="Google Sans"/>
-                <a:ea typeface="Google Sans"/>
-              </a:rPr>
-              <a:t>The role definitions and DAX expressions are also published. </a:t>
-            </a:r>
-            <a:endParaRPr sz="1600" b="0" i="0">
-              <a:solidFill>
-                <a:srgbClr val="001D35"/>
-              </a:solidFill>
-              <a:latin typeface="Google Sans"/>
-              <a:ea typeface="Google Sans"/>
-            </a:endParaRPr>
-          </a:p>
-          <a:p>
-            <a:pPr marL="0" indent="0">
-              <a:spcBef>
-                <a:spcPct val="0"/>
-              </a:spcBef>
-              <a:spcAft>
-                <a:spcPts val="400"/>
-              </a:spcAft>
-              <a:buAutoNum type="arabicPeriod"/>
-            </a:pPr>
-            <a:r>
-              <a:rPr sz="1600" b="0" i="0">
-                <a:solidFill>
-                  <a:srgbClr val="001D35"/>
-                </a:solidFill>
-                <a:latin typeface="Google Sans"/>
-                <a:ea typeface="Google Sans"/>
-              </a:rPr>
-              <a:t>Assign Users to Roles:</a:t>
-            </a:r>
-            <a:endParaRPr sz="1600" b="0" i="0">
-              <a:solidFill>
-                <a:srgbClr val="001D35"/>
-              </a:solidFill>
-              <a:latin typeface="Google Sans"/>
-              <a:ea typeface="Google Sans"/>
-            </a:endParaRPr>
-          </a:p>
-          <a:p>
-            <a:pPr marL="0" lvl="1" indent="0">
-              <a:spcBef>
-                <a:spcPct val="0"/>
-              </a:spcBef>
-              <a:spcAft>
-                <a:spcPts val="400"/>
-              </a:spcAft>
-              <a:buFont typeface="Arial" panose="020B0604020202020204"/>
-              <a:buChar char="◦"/>
-            </a:pPr>
-            <a:r>
-              <a:rPr sz="1600" b="0" i="0">
-                <a:solidFill>
-                  <a:srgbClr val="001D35"/>
-                </a:solidFill>
-                <a:latin typeface="Google Sans"/>
-                <a:ea typeface="Google Sans"/>
-              </a:rPr>
-              <a:t>In the Power BI service, you can assign users to the roles you created. </a:t>
-            </a:r>
-            <a:endParaRPr sz="1600" b="0" i="0">
-              <a:solidFill>
-                <a:srgbClr val="001D35"/>
-              </a:solidFill>
-              <a:latin typeface="Google Sans"/>
-              <a:ea typeface="Google Sans"/>
-            </a:endParaRPr>
-          </a:p>
-          <a:p>
-            <a:pPr marL="0" lvl="1" indent="0">
-              <a:spcBef>
-                <a:spcPct val="0"/>
-              </a:spcBef>
-              <a:spcAft>
-                <a:spcPct val="0"/>
-              </a:spcAft>
-              <a:buFont typeface="Arial" panose="020B0604020202020204"/>
-              <a:buChar char="◦"/>
-            </a:pPr>
-            <a:r>
-              <a:rPr sz="1600" b="0" i="0">
-                <a:solidFill>
-                  <a:srgbClr val="001D35"/>
-                </a:solidFill>
-                <a:latin typeface="Google Sans"/>
-                <a:ea typeface="Google Sans"/>
-              </a:rPr>
-              <a:t>Only semantic model owners or workspace admins can add members to roles. </a:t>
-            </a:r>
-            <a:endParaRPr sz="1600" b="0" i="0">
-              <a:solidFill>
-                <a:srgbClr val="001D35"/>
-              </a:solidFill>
-              <a:latin typeface="Google Sans"/>
-              <a:ea typeface="Google Sans"/>
-            </a:endParaRPr>
-          </a:p>
-          <a:p>
-            <a:pPr marL="0" indent="0">
-              <a:spcBef>
-                <a:spcPct val="0"/>
-              </a:spcBef>
-              <a:spcAft>
-                <a:spcPct val="0"/>
-              </a:spcAft>
-              <a:buAutoNum type="arabicPeriod"/>
-            </a:pPr>
-            <a:r>
-              <a:rPr sz="1600" b="0" i="0">
-                <a:solidFill>
-                  <a:srgbClr val="001D35"/>
-                </a:solidFill>
-                <a:latin typeface="Google Sans"/>
-                <a:ea typeface="Google Sans"/>
-              </a:rPr>
-              <a:t>Test the Security:</a:t>
-            </a:r>
-            <a:endParaRPr sz="1600" b="0" i="0">
-              <a:solidFill>
-                <a:srgbClr val="001D35"/>
-              </a:solidFill>
-              <a:latin typeface="Google Sans"/>
-              <a:ea typeface="Google Sans"/>
-            </a:endParaRPr>
-          </a:p>
-          <a:p>
-            <a:pPr marL="0" lvl="1" indent="0">
-              <a:spcBef>
-                <a:spcPct val="0"/>
-              </a:spcBef>
-              <a:spcAft>
-                <a:spcPct val="0"/>
-              </a:spcAft>
-              <a:buFont typeface="Arial" panose="020B0604020202020204"/>
-              <a:buChar char="◦"/>
-            </a:pPr>
-            <a:r>
-              <a:rPr sz="1600" b="0" i="0">
-                <a:solidFill>
-                  <a:srgbClr val="001D35"/>
-                </a:solidFill>
-                <a:latin typeface="Google Sans"/>
-                <a:ea typeface="Google Sans"/>
-              </a:rPr>
-              <a:t>Test the security by logging in as different users and verifying that they only see the data they are authorized to view. </a:t>
-            </a:r>
-            <a:endParaRPr sz="1600" b="0" i="0">
-              <a:solidFill>
-                <a:srgbClr val="001D35"/>
-              </a:solidFill>
-              <a:latin typeface="Google Sans"/>
-              <a:ea typeface="Google Sans"/>
-            </a:endParaRPr>
-          </a:p>
-        </p:txBody>
-      </p:sp>
-      <p:sp>
-        <p:nvSpPr>
-          <p:cNvPr id="5" name="Text Box 4"/>
-          <p:cNvSpPr txBox="1"/>
-          <p:nvPr/>
-        </p:nvSpPr>
-        <p:spPr>
-          <a:xfrm>
-            <a:off x="522605" y="5981700"/>
-            <a:ext cx="6096000" cy="368300"/>
-          </a:xfrm>
-          <a:prstGeom prst="rect">
-            <a:avLst/>
-          </a:prstGeom>
-          <a:noFill/>
-        </p:spPr>
-        <p:txBody>
-          <a:bodyPr wrap="square" rtlCol="0" anchor="t">
-            <a:spAutoFit/>
-          </a:bodyPr>
-          <a:p>
-            <a:r>
-              <a:rPr lang="en-US" altLang="en-US">
-                <a:solidFill>
-                  <a:srgbClr val="00B0F0"/>
-                </a:solidFill>
-              </a:rPr>
-              <a:t>https://www.edureka.co/blog/row-level-security-in-power-bi/</a:t>
-            </a:r>
-            <a:endParaRPr lang="en-US" altLang="en-US">
-              <a:solidFill>
-                <a:srgbClr val="00B0F0"/>
-              </a:solidFill>
-            </a:endParaRPr>
-          </a:p>
-        </p:txBody>
-      </p:sp>
-    </p:spTree>
-  </p:cSld>
-  <p:clrMapOvr>
-    <a:masterClrMapping/>
-  </p:clrMapOvr>
-</p:sld>
-</file>
-
-<file path=ppt/slides/slide25.xml><?xml version="1.0" encoding="utf-8"?>
-<p:sld xmlns:a="http://schemas.openxmlformats.org/drawingml/2006/main" xmlns:r="http://schemas.openxmlformats.org/officeDocument/2006/relationships" xmlns:p="http://schemas.openxmlformats.org/presentationml/2006/main">
-  <p:cSld>
-    <p:spTree>
-      <p:nvGrpSpPr>
-        <p:cNvPr id="1" name=""/>
-        <p:cNvGrpSpPr/>
-        <p:nvPr/>
-      </p:nvGrpSpPr>
-      <p:grpSpPr/>
-      <p:sp>
-        <p:nvSpPr>
-          <p:cNvPr id="2" name="Text Box 1"/>
-          <p:cNvSpPr txBox="1"/>
-          <p:nvPr/>
-        </p:nvSpPr>
-        <p:spPr>
-          <a:xfrm>
-            <a:off x="746760" y="457200"/>
-            <a:ext cx="6096000" cy="1981200"/>
-          </a:xfrm>
-          <a:prstGeom prst="rect">
-            <a:avLst/>
-          </a:prstGeom>
-          <a:noFill/>
-        </p:spPr>
-        <p:txBody>
-          <a:bodyPr wrap="square" rtlCol="0" anchor="t">
-            <a:spAutoFit/>
-          </a:bodyPr>
-          <a:p>
-            <a:pPr marL="0" indent="0">
-              <a:spcBef>
-                <a:spcPts val="1000"/>
-              </a:spcBef>
-              <a:spcAft>
-                <a:spcPts val="500"/>
-              </a:spcAft>
-            </a:pPr>
-            <a:r>
-              <a:rPr sz="1600">
-                <a:solidFill>
-                  <a:srgbClr val="001D35"/>
-                </a:solidFill>
-                <a:latin typeface="Google Sans"/>
-                <a:ea typeface="Google Sans"/>
-                <a:sym typeface="+mn-ea"/>
-              </a:rPr>
-              <a:t>Types of RLS:</a:t>
-            </a:r>
-            <a:endParaRPr sz="1600" b="0" i="0">
-              <a:solidFill>
-                <a:srgbClr val="001D35"/>
-              </a:solidFill>
-              <a:latin typeface="Google Sans"/>
-              <a:ea typeface="Google Sans"/>
-            </a:endParaRPr>
-          </a:p>
-          <a:p>
-            <a:pPr marL="0" indent="0">
-              <a:spcBef>
-                <a:spcPct val="0"/>
-              </a:spcBef>
-              <a:spcAft>
-                <a:spcPts val="400"/>
-              </a:spcAft>
-              <a:buFont typeface="Arial" panose="020B0604020202020204"/>
-              <a:buChar char="•"/>
-            </a:pPr>
-            <a:r>
-              <a:rPr sz="1600">
-                <a:solidFill>
-                  <a:srgbClr val="001D35"/>
-                </a:solidFill>
-                <a:latin typeface="Google Sans"/>
-                <a:ea typeface="Google Sans"/>
-                <a:sym typeface="+mn-ea"/>
-              </a:rPr>
-              <a:t>Static RLS:</a:t>
-            </a:r>
-            <a:endParaRPr sz="1600" b="0" i="0">
-              <a:solidFill>
-                <a:srgbClr val="001D35"/>
-              </a:solidFill>
-              <a:latin typeface="Google Sans"/>
-              <a:ea typeface="Google Sans"/>
-            </a:endParaRPr>
-          </a:p>
-          <a:p>
-            <a:pPr marL="0" indent="0">
-              <a:spcBef>
-                <a:spcPct val="0"/>
-              </a:spcBef>
-              <a:spcAft>
-                <a:spcPts val="400"/>
-              </a:spcAft>
-            </a:pPr>
-            <a:r>
-              <a:rPr sz="1600">
-                <a:solidFill>
-                  <a:srgbClr val="001D35"/>
-                </a:solidFill>
-                <a:latin typeface="Google Sans"/>
-                <a:ea typeface="Google Sans"/>
-                <a:sym typeface="+mn-ea"/>
-              </a:rPr>
-              <a:t>Security logic is hardcoded within the PBIX file and doesn't change dynamically. </a:t>
-            </a:r>
-            <a:endParaRPr sz="1600" b="0" i="0">
-              <a:solidFill>
-                <a:srgbClr val="001D35"/>
-              </a:solidFill>
-              <a:latin typeface="Google Sans"/>
-              <a:ea typeface="Google Sans"/>
-            </a:endParaRPr>
-          </a:p>
-          <a:p>
-            <a:pPr marL="0" indent="0">
-              <a:spcBef>
-                <a:spcPct val="0"/>
-              </a:spcBef>
-              <a:spcAft>
-                <a:spcPct val="0"/>
-              </a:spcAft>
-              <a:buFont typeface="Arial" panose="020B0604020202020204"/>
-              <a:buChar char="•"/>
-            </a:pPr>
-            <a:r>
-              <a:rPr sz="1600">
-                <a:solidFill>
-                  <a:srgbClr val="001D35"/>
-                </a:solidFill>
-                <a:latin typeface="Google Sans"/>
-                <a:ea typeface="Google Sans"/>
-                <a:sym typeface="+mn-ea"/>
-              </a:rPr>
-              <a:t>Dynamic RLS:</a:t>
-            </a:r>
-            <a:endParaRPr sz="1600" b="0" i="0">
-              <a:solidFill>
-                <a:srgbClr val="001D35"/>
-              </a:solidFill>
-              <a:latin typeface="Google Sans"/>
-              <a:ea typeface="Google Sans"/>
-            </a:endParaRPr>
-          </a:p>
-          <a:p>
-            <a:pPr marL="0" indent="0">
-              <a:spcBef>
-                <a:spcPct val="0"/>
-              </a:spcBef>
-              <a:spcAft>
-                <a:spcPct val="0"/>
-              </a:spcAft>
-            </a:pPr>
-            <a:r>
-              <a:rPr sz="1600">
-                <a:solidFill>
-                  <a:srgbClr val="001D35"/>
-                </a:solidFill>
-                <a:latin typeface="Google Sans"/>
-                <a:ea typeface="Google Sans"/>
-                <a:sym typeface="+mn-ea"/>
-              </a:rPr>
-              <a:t>Security logic can be adjusted based on the user's context (e.g., their username or role). </a:t>
-            </a:r>
-            <a:endParaRPr lang="en-US" sz="1600">
-              <a:solidFill>
-                <a:srgbClr val="001D35"/>
-              </a:solidFill>
-              <a:latin typeface="Google Sans"/>
-              <a:ea typeface="Google Sans"/>
-              <a:sym typeface="+mn-ea"/>
-            </a:endParaRPr>
-          </a:p>
-        </p:txBody>
-      </p:sp>
-      <p:sp>
-        <p:nvSpPr>
-          <p:cNvPr id="4" name="Text Box 3"/>
-          <p:cNvSpPr txBox="1"/>
-          <p:nvPr/>
-        </p:nvSpPr>
-        <p:spPr>
-          <a:xfrm>
-            <a:off x="434340" y="3106420"/>
-            <a:ext cx="8709660" cy="368300"/>
-          </a:xfrm>
-          <a:prstGeom prst="rect">
-            <a:avLst/>
-          </a:prstGeom>
-          <a:noFill/>
-        </p:spPr>
-        <p:txBody>
-          <a:bodyPr wrap="square" rtlCol="0" anchor="t">
-            <a:spAutoFit/>
-          </a:bodyPr>
-          <a:p>
-            <a:r>
-              <a:rPr lang="en-US" altLang="en-US"/>
-              <a:t>https://learn.microsoft.com/en-us/fabric/security/service-admin-row-level-security</a:t>
-            </a:r>
-            <a:endParaRPr lang="en-US"/>
-          </a:p>
-        </p:txBody>
-      </p:sp>
-    </p:spTree>
-  </p:cSld>
-  <p:clrMapOvr>
-    <a:masterClrMapping/>
-  </p:clrMapOvr>
-</p:sld>
-</file>
-
-<file path=ppt/slides/slide26.xml><?xml version="1.0" encoding="utf-8"?>
-<p:sld xmlns:a="http://schemas.openxmlformats.org/drawingml/2006/main" xmlns:r="http://schemas.openxmlformats.org/officeDocument/2006/relationships" xmlns:p="http://schemas.openxmlformats.org/presentationml/2006/main">
-  <p:cSld>
-    <p:spTree>
-      <p:nvGrpSpPr>
-        <p:cNvPr id="1" name=""/>
-        <p:cNvGrpSpPr/>
-        <p:nvPr/>
-      </p:nvGrpSpPr>
-      <p:grpSpPr/>
-      <p:sp>
-        <p:nvSpPr>
-          <p:cNvPr id="2" name="Text Box 1"/>
-          <p:cNvSpPr txBox="1"/>
-          <p:nvPr/>
-        </p:nvSpPr>
-        <p:spPr>
-          <a:xfrm>
-            <a:off x="657225" y="571500"/>
-            <a:ext cx="9698355" cy="2614930"/>
-          </a:xfrm>
-          <a:prstGeom prst="rect">
-            <a:avLst/>
-          </a:prstGeom>
-          <a:noFill/>
-        </p:spPr>
-        <p:txBody>
-          <a:bodyPr wrap="square" rtlCol="0">
-            <a:spAutoFit/>
-          </a:bodyPr>
-          <a:p>
-            <a:r>
-              <a:rPr lang="en-IN" altLang="en-US" sz="2000" b="1">
-                <a:solidFill>
-                  <a:srgbClr val="C00000"/>
-                </a:solidFill>
-                <a:effectLst>
-                  <a:outerShdw blurRad="38100" dist="38100" dir="2700000" algn="tl">
-                    <a:srgbClr val="000000">
-                      <a:alpha val="43137"/>
-                    </a:srgbClr>
-                  </a:outerShdw>
-                </a:effectLst>
-              </a:rPr>
-              <a:t>Direct Query</a:t>
-            </a:r>
-            <a:endParaRPr lang="en-IN" altLang="en-US" sz="2000" b="1">
-              <a:solidFill>
-                <a:srgbClr val="C00000"/>
-              </a:solidFill>
-              <a:effectLst>
-                <a:outerShdw blurRad="38100" dist="38100" dir="2700000" algn="tl">
-                  <a:srgbClr val="000000">
-                    <a:alpha val="43137"/>
-                  </a:srgbClr>
-                </a:outerShdw>
-              </a:effectLst>
-            </a:endParaRPr>
-          </a:p>
-          <a:p>
-            <a:r>
-              <a:rPr lang="en-US" altLang="en-US" b="1"/>
-              <a:t>What is a direct query in Power BI?</a:t>
-            </a:r>
-            <a:endParaRPr lang="en-US" altLang="en-US" b="1"/>
-          </a:p>
-          <a:p>
-            <a:endParaRPr lang="en-US" altLang="en-US" b="1"/>
-          </a:p>
-          <a:p>
-            <a:r>
-              <a:rPr lang="en-US" altLang="en-US"/>
-              <a:t>DirectQuery is a direct connection to data source. Data will NOT be stored in Power BI model. Power BI will be a visualization layer, then query the data from data source every time. Power BI will only store metadata of tables (table names, column names, relationships…) but not the data.</a:t>
-            </a:r>
-            <a:endParaRPr lang="en-US" altLang="en-US"/>
-          </a:p>
-          <a:p>
-            <a:endParaRPr lang="en-US" altLang="en-US"/>
-          </a:p>
-          <a:p>
-            <a:endParaRPr lang="en-US" altLang="en-US"/>
-          </a:p>
-          <a:p>
-            <a:r>
-              <a:rPr lang="en-US" altLang="en-US"/>
-              <a:t>https://blog.coupler.io/power-bi-directquery/</a:t>
-            </a:r>
-            <a:endParaRPr lang="en-US" altLang="en-US"/>
-          </a:p>
-        </p:txBody>
-      </p:sp>
-    </p:spTree>
-  </p:cSld>
-  <p:clrMapOvr>
-    <a:masterClrMapping/>
-  </p:clrMapOvr>
-</p:sld>
-</file>
-
-<file path=ppt/slides/slide27.xml><?xml version="1.0" encoding="utf-8"?>
-<p:sld xmlns:a="http://schemas.openxmlformats.org/drawingml/2006/main" xmlns:r="http://schemas.openxmlformats.org/officeDocument/2006/relationships" xmlns:p="http://schemas.openxmlformats.org/presentationml/2006/main">
-  <p:cSld>
-    <p:spTree>
-      <p:nvGrpSpPr>
-        <p:cNvPr id="1" name=""/>
-        <p:cNvGrpSpPr/>
-        <p:nvPr/>
-      </p:nvGrpSpPr>
-      <p:grpSpPr/>
-      <p:sp>
-        <p:nvSpPr>
-          <p:cNvPr id="2" name="Text Box 1"/>
-          <p:cNvSpPr txBox="1"/>
-          <p:nvPr/>
-        </p:nvSpPr>
-        <p:spPr>
-          <a:xfrm>
-            <a:off x="379730" y="237490"/>
-            <a:ext cx="8940165" cy="5613400"/>
-          </a:xfrm>
-          <a:prstGeom prst="rect">
-            <a:avLst/>
-          </a:prstGeom>
-        </p:spPr>
-        <p:txBody>
-          <a:bodyPr wrap="square">
-            <a:spAutoFit/>
-          </a:bodyPr>
-          <a:p>
-            <a:pPr marL="0" indent="0">
-              <a:spcBef>
-                <a:spcPct val="0"/>
-              </a:spcBef>
-              <a:spcAft>
-                <a:spcPts val="1000"/>
-              </a:spcAft>
-            </a:pPr>
-            <a:r>
-              <a:rPr sz="1600" b="0" i="0">
-                <a:solidFill>
-                  <a:srgbClr val="001D35"/>
-                </a:solidFill>
-                <a:latin typeface="Google Sans"/>
-                <a:ea typeface="Google Sans"/>
-              </a:rPr>
-              <a:t>In Power BI's Power Query Editor, "Pivot" transforms rows into columns, while "Unpivot" does the opposite, turning columns into rows, allowing for data reorganization and analysis. </a:t>
-            </a:r>
-            <a:endParaRPr sz="1600" b="0" i="0">
-              <a:solidFill>
-                <a:srgbClr val="001D35"/>
-              </a:solidFill>
-              <a:latin typeface="Google Sans"/>
-              <a:ea typeface="Google Sans"/>
-            </a:endParaRPr>
-          </a:p>
-          <a:p>
-            <a:pPr marL="0" indent="0">
-              <a:spcBef>
-                <a:spcPts val="1000"/>
-              </a:spcBef>
-              <a:spcAft>
-                <a:spcPts val="500"/>
-              </a:spcAft>
-            </a:pPr>
-            <a:r>
-              <a:rPr sz="2000" b="1" i="0">
-                <a:solidFill>
-                  <a:srgbClr val="C00000"/>
-                </a:solidFill>
-                <a:effectLst>
-                  <a:outerShdw blurRad="38100" dist="38100" dir="2700000" algn="tl">
-                    <a:srgbClr val="000000">
-                      <a:alpha val="43137"/>
-                    </a:srgbClr>
-                  </a:outerShdw>
-                </a:effectLst>
-                <a:latin typeface="Google Sans"/>
-                <a:ea typeface="Google Sans"/>
-              </a:rPr>
-              <a:t>Pivot:</a:t>
-            </a:r>
-            <a:endParaRPr sz="2000" b="1" i="0">
-              <a:solidFill>
-                <a:srgbClr val="C00000"/>
-              </a:solidFill>
-              <a:effectLst>
-                <a:outerShdw blurRad="38100" dist="38100" dir="2700000" algn="tl">
-                  <a:srgbClr val="000000">
-                    <a:alpha val="43137"/>
-                  </a:srgbClr>
-                </a:outerShdw>
-              </a:effectLst>
-              <a:latin typeface="Google Sans"/>
-              <a:ea typeface="Google Sans"/>
-            </a:endParaRPr>
-          </a:p>
-          <a:p>
-            <a:pPr marL="0" indent="0">
-              <a:spcBef>
-                <a:spcPct val="0"/>
-              </a:spcBef>
-              <a:spcAft>
-                <a:spcPts val="400"/>
-              </a:spcAft>
-              <a:buFont typeface="Arial" panose="020B0604020202020204"/>
-              <a:buChar char="•"/>
-            </a:pPr>
-            <a:r>
-              <a:rPr sz="1600" b="1" i="0">
-                <a:solidFill>
-                  <a:srgbClr val="001D35"/>
-                </a:solidFill>
-                <a:latin typeface="Google Sans"/>
-                <a:ea typeface="Google Sans"/>
-              </a:rPr>
-              <a:t>Purpose:</a:t>
-            </a:r>
-            <a:endParaRPr sz="1600" b="1" i="0">
-              <a:solidFill>
-                <a:srgbClr val="001D35"/>
-              </a:solidFill>
-              <a:latin typeface="Google Sans"/>
-              <a:ea typeface="Google Sans"/>
-            </a:endParaRPr>
-          </a:p>
-          <a:p>
-            <a:pPr marL="0" indent="0">
-              <a:spcBef>
-                <a:spcPct val="0"/>
-              </a:spcBef>
-              <a:spcAft>
-                <a:spcPts val="400"/>
-              </a:spcAft>
-            </a:pPr>
-            <a:r>
-              <a:rPr sz="1600" b="0" i="0">
-                <a:solidFill>
-                  <a:srgbClr val="001D35"/>
-                </a:solidFill>
-                <a:latin typeface="Google Sans"/>
-                <a:ea typeface="Google Sans"/>
-              </a:rPr>
-              <a:t>Transforms data from a long format (many rows, few columns) to a wide format (few rows, many columns). </a:t>
-            </a:r>
-            <a:endParaRPr sz="1600" b="0" i="0">
-              <a:solidFill>
-                <a:srgbClr val="001D35"/>
-              </a:solidFill>
-              <a:latin typeface="Google Sans"/>
-              <a:ea typeface="Google Sans"/>
-            </a:endParaRPr>
-          </a:p>
-          <a:p>
-            <a:pPr marL="0" indent="0">
-              <a:spcBef>
-                <a:spcPct val="0"/>
-              </a:spcBef>
-              <a:spcAft>
-                <a:spcPts val="400"/>
-              </a:spcAft>
-            </a:pPr>
-            <a:endParaRPr sz="1600" b="0" i="0">
-              <a:solidFill>
-                <a:srgbClr val="001D35"/>
-              </a:solidFill>
-              <a:latin typeface="Google Sans"/>
-              <a:ea typeface="Google Sans"/>
-            </a:endParaRPr>
-          </a:p>
-          <a:p>
-            <a:pPr marL="0" indent="0">
-              <a:spcBef>
-                <a:spcPct val="0"/>
-              </a:spcBef>
-              <a:spcAft>
-                <a:spcPts val="400"/>
-              </a:spcAft>
-              <a:buFont typeface="Arial" panose="020B0604020202020204"/>
-              <a:buChar char="•"/>
-            </a:pPr>
-            <a:r>
-              <a:rPr sz="1600" b="1" i="0">
-                <a:solidFill>
-                  <a:srgbClr val="001D35"/>
-                </a:solidFill>
-                <a:latin typeface="Google Sans"/>
-                <a:ea typeface="Google Sans"/>
-              </a:rPr>
-              <a:t>How:</a:t>
-            </a:r>
-            <a:endParaRPr sz="1600" b="1" i="0">
-              <a:solidFill>
-                <a:srgbClr val="001D35"/>
-              </a:solidFill>
-              <a:latin typeface="Google Sans"/>
-              <a:ea typeface="Google Sans"/>
-            </a:endParaRPr>
-          </a:p>
-          <a:p>
-            <a:pPr marL="0" indent="0">
-              <a:spcBef>
-                <a:spcPct val="0"/>
-              </a:spcBef>
-              <a:spcAft>
-                <a:spcPts val="400"/>
-              </a:spcAft>
-            </a:pPr>
-            <a:r>
-              <a:rPr sz="1600" b="0" i="0">
-                <a:solidFill>
-                  <a:srgbClr val="001D35"/>
-                </a:solidFill>
-                <a:latin typeface="Google Sans"/>
-                <a:ea typeface="Google Sans"/>
-              </a:rPr>
-              <a:t>Select the columns you want to pivot, then choose "Transform" &gt; "Pivot Column". </a:t>
-            </a:r>
-            <a:endParaRPr sz="1600" b="0" i="0">
-              <a:solidFill>
-                <a:srgbClr val="001D35"/>
-              </a:solidFill>
-              <a:latin typeface="Google Sans"/>
-              <a:ea typeface="Google Sans"/>
-            </a:endParaRPr>
-          </a:p>
-          <a:p>
-            <a:pPr marL="0" indent="0">
-              <a:spcBef>
-                <a:spcPct val="0"/>
-              </a:spcBef>
-              <a:spcAft>
-                <a:spcPts val="400"/>
-              </a:spcAft>
-            </a:pPr>
-            <a:endParaRPr sz="1600" b="0" i="0">
-              <a:solidFill>
-                <a:srgbClr val="001D35"/>
-              </a:solidFill>
-              <a:latin typeface="Google Sans"/>
-              <a:ea typeface="Google Sans"/>
-            </a:endParaRPr>
-          </a:p>
-          <a:p>
-            <a:pPr marL="0" indent="0">
-              <a:spcBef>
-                <a:spcPct val="0"/>
-              </a:spcBef>
-              <a:spcAft>
-                <a:spcPts val="400"/>
-              </a:spcAft>
-              <a:buFont typeface="Arial" panose="020B0604020202020204"/>
-              <a:buChar char="•"/>
-            </a:pPr>
-            <a:r>
-              <a:rPr sz="1600" b="1" i="0">
-                <a:solidFill>
-                  <a:srgbClr val="001D35"/>
-                </a:solidFill>
-                <a:latin typeface="Google Sans"/>
-                <a:ea typeface="Google Sans"/>
-              </a:rPr>
-              <a:t>Example:</a:t>
-            </a:r>
-            <a:endParaRPr sz="1600" b="1" i="0">
-              <a:solidFill>
-                <a:srgbClr val="001D35"/>
-              </a:solidFill>
-              <a:latin typeface="Google Sans"/>
-              <a:ea typeface="Google Sans"/>
-            </a:endParaRPr>
-          </a:p>
-          <a:p>
-            <a:pPr marL="0" indent="0">
-              <a:spcBef>
-                <a:spcPct val="0"/>
-              </a:spcBef>
-              <a:spcAft>
-                <a:spcPts val="400"/>
-              </a:spcAft>
-            </a:pPr>
-            <a:r>
-              <a:rPr sz="1600" b="0" i="0">
-                <a:solidFill>
-                  <a:srgbClr val="001D35"/>
-                </a:solidFill>
-                <a:latin typeface="Google Sans"/>
-                <a:ea typeface="Google Sans"/>
-              </a:rPr>
-              <a:t>If you have a table with "Region" and "Sales Amount" in separate columns, pivoting on "Region" will create separate columns for each region, with the "Sales Amount" values in those columns. </a:t>
-            </a:r>
-            <a:endParaRPr sz="1600" b="0" i="0">
-              <a:solidFill>
-                <a:srgbClr val="001D35"/>
-              </a:solidFill>
-              <a:latin typeface="Google Sans"/>
-              <a:ea typeface="Google Sans"/>
-            </a:endParaRPr>
-          </a:p>
-          <a:p>
-            <a:pPr marL="0" indent="0">
-              <a:spcBef>
-                <a:spcPct val="0"/>
-              </a:spcBef>
-              <a:spcAft>
-                <a:spcPts val="400"/>
-              </a:spcAft>
-            </a:pPr>
-            <a:endParaRPr sz="1600" b="0" i="0">
-              <a:solidFill>
-                <a:srgbClr val="001D35"/>
-              </a:solidFill>
-              <a:latin typeface="Google Sans"/>
-              <a:ea typeface="Google Sans"/>
-            </a:endParaRPr>
-          </a:p>
-          <a:p>
-            <a:pPr marL="0" indent="0">
-              <a:spcBef>
-                <a:spcPct val="0"/>
-              </a:spcBef>
-              <a:spcAft>
-                <a:spcPct val="0"/>
-              </a:spcAft>
-              <a:buFont typeface="Arial" panose="020B0604020202020204"/>
-              <a:buChar char="•"/>
-            </a:pPr>
-            <a:r>
-              <a:rPr sz="1600" b="1" i="0">
-                <a:solidFill>
-                  <a:srgbClr val="001D35"/>
-                </a:solidFill>
-                <a:latin typeface="Google Sans"/>
-                <a:ea typeface="Google Sans"/>
-              </a:rPr>
-              <a:t>Aggregation:</a:t>
-            </a:r>
-            <a:endParaRPr sz="1600" b="1" i="0">
-              <a:solidFill>
-                <a:srgbClr val="001D35"/>
-              </a:solidFill>
-              <a:latin typeface="Google Sans"/>
-              <a:ea typeface="Google Sans"/>
-            </a:endParaRPr>
-          </a:p>
-          <a:p>
-            <a:pPr marL="0" indent="0">
-              <a:spcBef>
-                <a:spcPct val="0"/>
-              </a:spcBef>
-              <a:spcAft>
-                <a:spcPct val="0"/>
-              </a:spcAft>
-            </a:pPr>
-            <a:r>
-              <a:rPr sz="1600" b="0" i="0">
-                <a:solidFill>
-                  <a:srgbClr val="001D35"/>
-                </a:solidFill>
-                <a:latin typeface="Google Sans"/>
-                <a:ea typeface="Google Sans"/>
-              </a:rPr>
-              <a:t>Pivot also aggregates the values in the remaining columns (e.g., if you have multiple "Sales Amount" values for the same region, it will sum or average them). </a:t>
-            </a:r>
-            <a:endParaRPr sz="1600" b="0" i="0">
-              <a:solidFill>
-                <a:srgbClr val="001D35"/>
-              </a:solidFill>
-              <a:latin typeface="Google Sans"/>
-              <a:ea typeface="Google Sans"/>
-            </a:endParaRPr>
-          </a:p>
-        </p:txBody>
-      </p:sp>
-    </p:spTree>
-  </p:cSld>
-  <p:clrMapOvr>
-    <a:masterClrMapping/>
-  </p:clrMapOvr>
-</p:sld>
-</file>
-
-<file path=ppt/slides/slide28.xml><?xml version="1.0" encoding="utf-8"?>
-<p:sld xmlns:a="http://schemas.openxmlformats.org/drawingml/2006/main" xmlns:r="http://schemas.openxmlformats.org/officeDocument/2006/relationships" xmlns:p="http://schemas.openxmlformats.org/presentationml/2006/main">
-  <p:cSld>
-    <p:spTree>
-      <p:nvGrpSpPr>
-        <p:cNvPr id="1" name=""/>
-        <p:cNvGrpSpPr/>
-        <p:nvPr/>
-      </p:nvGrpSpPr>
-      <p:grpSpPr/>
-      <p:sp>
-        <p:nvSpPr>
-          <p:cNvPr id="2" name="Text Box 1"/>
-          <p:cNvSpPr txBox="1"/>
-          <p:nvPr/>
-        </p:nvSpPr>
-        <p:spPr>
-          <a:xfrm>
-            <a:off x="345440" y="207010"/>
-            <a:ext cx="7807960" cy="5487670"/>
-          </a:xfrm>
-          <a:prstGeom prst="rect">
-            <a:avLst/>
-          </a:prstGeom>
-        </p:spPr>
-        <p:txBody>
-          <a:bodyPr wrap="square">
-            <a:spAutoFit/>
-          </a:bodyPr>
-          <a:p>
-            <a:pPr marL="0" indent="0">
-              <a:spcBef>
-                <a:spcPts val="1000"/>
-              </a:spcBef>
-              <a:spcAft>
-                <a:spcPts val="500"/>
-              </a:spcAft>
-            </a:pPr>
-            <a:r>
-              <a:rPr sz="2400" b="1" i="0">
-                <a:solidFill>
-                  <a:srgbClr val="C00000"/>
-                </a:solidFill>
-                <a:effectLst>
-                  <a:outerShdw blurRad="38100" dist="38100" dir="2700000" algn="tl">
-                    <a:srgbClr val="000000">
-                      <a:alpha val="43137"/>
-                    </a:srgbClr>
-                  </a:outerShdw>
-                </a:effectLst>
-                <a:latin typeface="Arial" panose="020B0604020202020204" pitchFamily="34" charset="0"/>
-                <a:ea typeface="Google Sans"/>
-                <a:cs typeface="Arial" panose="020B0604020202020204" pitchFamily="34" charset="0"/>
-              </a:rPr>
-              <a:t>Unpivot:</a:t>
-            </a:r>
-            <a:endParaRPr sz="2400" b="1" i="0">
-              <a:solidFill>
-                <a:srgbClr val="C00000"/>
-              </a:solidFill>
-              <a:effectLst>
-                <a:outerShdw blurRad="38100" dist="38100" dir="2700000" algn="tl">
-                  <a:srgbClr val="000000">
-                    <a:alpha val="43137"/>
-                  </a:srgbClr>
-                </a:outerShdw>
-              </a:effectLst>
-              <a:latin typeface="Arial" panose="020B0604020202020204" pitchFamily="34" charset="0"/>
-              <a:ea typeface="Google Sans"/>
-              <a:cs typeface="Arial" panose="020B0604020202020204" pitchFamily="34" charset="0"/>
-            </a:endParaRPr>
-          </a:p>
-          <a:p>
-            <a:pPr marL="0" indent="0">
-              <a:spcBef>
-                <a:spcPts val="1000"/>
-              </a:spcBef>
-              <a:spcAft>
-                <a:spcPts val="500"/>
-              </a:spcAft>
-            </a:pPr>
-            <a:endParaRPr sz="2400" i="0">
-              <a:solidFill>
-                <a:srgbClr val="C00000"/>
-              </a:solidFill>
-              <a:effectLst>
-                <a:outerShdw blurRad="38100" dist="38100" dir="2700000" algn="tl">
-                  <a:srgbClr val="000000">
-                    <a:alpha val="43137"/>
-                  </a:srgbClr>
-                </a:outerShdw>
-              </a:effectLst>
-              <a:latin typeface="Google Sans"/>
-              <a:ea typeface="Google Sans"/>
-            </a:endParaRPr>
-          </a:p>
-          <a:p>
-            <a:pPr marL="0" indent="0">
-              <a:spcBef>
-                <a:spcPct val="0"/>
-              </a:spcBef>
-              <a:spcAft>
-                <a:spcPts val="400"/>
-              </a:spcAft>
-              <a:buFont typeface="Arial" panose="020B0604020202020204"/>
-              <a:buChar char="•"/>
-            </a:pPr>
-            <a:r>
-              <a:rPr sz="1600" b="1" i="0">
-                <a:solidFill>
-                  <a:srgbClr val="001D35"/>
-                </a:solidFill>
-                <a:latin typeface="Google Sans"/>
-                <a:ea typeface="Google Sans"/>
-              </a:rPr>
-              <a:t>Purpose:</a:t>
-            </a:r>
-            <a:endParaRPr sz="1600" b="1" i="0">
-              <a:solidFill>
-                <a:srgbClr val="001D35"/>
-              </a:solidFill>
-              <a:latin typeface="Google Sans"/>
-              <a:ea typeface="Google Sans"/>
-            </a:endParaRPr>
-          </a:p>
-          <a:p>
-            <a:pPr marL="0" indent="0">
-              <a:spcBef>
-                <a:spcPct val="0"/>
-              </a:spcBef>
-              <a:spcAft>
-                <a:spcPts val="400"/>
-              </a:spcAft>
-            </a:pPr>
-            <a:r>
-              <a:rPr sz="1600" b="0" i="0">
-                <a:solidFill>
-                  <a:srgbClr val="001D35"/>
-                </a:solidFill>
-                <a:latin typeface="Google Sans"/>
-                <a:ea typeface="Google Sans"/>
-              </a:rPr>
-              <a:t>Transforms data from a wide format to a long format. </a:t>
-            </a:r>
-            <a:endParaRPr sz="1600" b="0" i="0">
-              <a:solidFill>
-                <a:srgbClr val="001D35"/>
-              </a:solidFill>
-              <a:latin typeface="Google Sans"/>
-              <a:ea typeface="Google Sans"/>
-            </a:endParaRPr>
-          </a:p>
-          <a:p>
-            <a:pPr marL="0" indent="0">
-              <a:spcBef>
-                <a:spcPct val="0"/>
-              </a:spcBef>
-              <a:spcAft>
-                <a:spcPts val="400"/>
-              </a:spcAft>
-            </a:pPr>
-            <a:endParaRPr sz="1600" b="0" i="0">
-              <a:solidFill>
-                <a:srgbClr val="001D35"/>
-              </a:solidFill>
-              <a:latin typeface="Google Sans"/>
-              <a:ea typeface="Google Sans"/>
-            </a:endParaRPr>
-          </a:p>
-          <a:p>
-            <a:pPr marL="0" indent="0">
-              <a:spcBef>
-                <a:spcPct val="0"/>
-              </a:spcBef>
-              <a:spcAft>
-                <a:spcPts val="400"/>
-              </a:spcAft>
-              <a:buFont typeface="Arial" panose="020B0604020202020204"/>
-              <a:buChar char="•"/>
-            </a:pPr>
-            <a:r>
-              <a:rPr sz="1600" b="1" i="0">
-                <a:solidFill>
-                  <a:srgbClr val="001D35"/>
-                </a:solidFill>
-                <a:latin typeface="Google Sans"/>
-                <a:ea typeface="Google Sans"/>
-              </a:rPr>
-              <a:t>How:</a:t>
-            </a:r>
-            <a:endParaRPr sz="1600" b="1" i="0">
-              <a:solidFill>
-                <a:srgbClr val="001D35"/>
-              </a:solidFill>
-              <a:latin typeface="Google Sans"/>
-              <a:ea typeface="Google Sans"/>
-            </a:endParaRPr>
-          </a:p>
-          <a:p>
-            <a:pPr marL="0" indent="0">
-              <a:spcBef>
-                <a:spcPct val="0"/>
-              </a:spcBef>
-              <a:spcAft>
-                <a:spcPts val="400"/>
-              </a:spcAft>
-            </a:pPr>
-            <a:r>
-              <a:rPr sz="1600" b="0" i="0">
-                <a:solidFill>
-                  <a:srgbClr val="001D35"/>
-                </a:solidFill>
-                <a:latin typeface="Google Sans"/>
-                <a:ea typeface="Google Sans"/>
-              </a:rPr>
-              <a:t>Select the columns you want to unpivot, then choose "Transform" &gt; "Unpivot Columns". </a:t>
-            </a:r>
-            <a:endParaRPr sz="1600" b="0" i="0">
-              <a:solidFill>
-                <a:srgbClr val="001D35"/>
-              </a:solidFill>
-              <a:latin typeface="Google Sans"/>
-              <a:ea typeface="Google Sans"/>
-            </a:endParaRPr>
-          </a:p>
-          <a:p>
-            <a:pPr marL="0" indent="0">
-              <a:spcBef>
-                <a:spcPct val="0"/>
-              </a:spcBef>
-              <a:spcAft>
-                <a:spcPts val="400"/>
-              </a:spcAft>
-            </a:pPr>
-            <a:endParaRPr sz="1600" b="0" i="0">
-              <a:solidFill>
-                <a:srgbClr val="001D35"/>
-              </a:solidFill>
-              <a:latin typeface="Google Sans"/>
-              <a:ea typeface="Google Sans"/>
-            </a:endParaRPr>
-          </a:p>
-          <a:p>
-            <a:pPr marL="0" indent="0">
-              <a:spcBef>
-                <a:spcPct val="0"/>
-              </a:spcBef>
-              <a:spcAft>
-                <a:spcPts val="400"/>
-              </a:spcAft>
-              <a:buFont typeface="Arial" panose="020B0604020202020204"/>
-              <a:buChar char="•"/>
-            </a:pPr>
-            <a:r>
-              <a:rPr sz="1600" b="1" i="0">
-                <a:solidFill>
-                  <a:srgbClr val="001D35"/>
-                </a:solidFill>
-                <a:latin typeface="Google Sans"/>
-                <a:ea typeface="Google Sans"/>
-              </a:rPr>
-              <a:t>Example:</a:t>
-            </a:r>
-            <a:endParaRPr sz="1600" b="1" i="0">
-              <a:solidFill>
-                <a:srgbClr val="001D35"/>
-              </a:solidFill>
-              <a:latin typeface="Google Sans"/>
-              <a:ea typeface="Google Sans"/>
-            </a:endParaRPr>
-          </a:p>
-          <a:p>
-            <a:pPr marL="0" indent="0">
-              <a:spcBef>
-                <a:spcPct val="0"/>
-              </a:spcBef>
-              <a:spcAft>
-                <a:spcPts val="400"/>
-              </a:spcAft>
-            </a:pPr>
-            <a:r>
-              <a:rPr sz="1600" b="0" i="0">
-                <a:solidFill>
-                  <a:srgbClr val="001D35"/>
-                </a:solidFill>
-                <a:latin typeface="Google Sans"/>
-                <a:ea typeface="Google Sans"/>
-              </a:rPr>
-              <a:t>If you have a table with "North", "South", and "East" as columns, unpivoting them will create a single "Region" column with "North", "South", and "East" as values, and a "Sales Amount" column with the corresponding values. </a:t>
-            </a:r>
-            <a:endParaRPr sz="1600" b="0" i="0">
-              <a:solidFill>
-                <a:srgbClr val="001D35"/>
-              </a:solidFill>
-              <a:latin typeface="Google Sans"/>
-              <a:ea typeface="Google Sans"/>
-            </a:endParaRPr>
-          </a:p>
-          <a:p>
-            <a:pPr marL="0" indent="0">
-              <a:spcBef>
-                <a:spcPct val="0"/>
-              </a:spcBef>
-              <a:spcAft>
-                <a:spcPts val="400"/>
-              </a:spcAft>
-            </a:pPr>
-            <a:endParaRPr sz="1600" b="0" i="0">
-              <a:solidFill>
-                <a:srgbClr val="001D35"/>
-              </a:solidFill>
-              <a:latin typeface="Google Sans"/>
-              <a:ea typeface="Google Sans"/>
-            </a:endParaRPr>
-          </a:p>
-          <a:p>
-            <a:pPr marL="0" indent="0">
-              <a:spcBef>
-                <a:spcPct val="0"/>
-              </a:spcBef>
-              <a:spcAft>
-                <a:spcPct val="0"/>
-              </a:spcAft>
-              <a:buFont typeface="Arial" panose="020B0604020202020204"/>
-              <a:buChar char="•"/>
-            </a:pPr>
-            <a:r>
-              <a:rPr sz="1600" b="1" i="0">
-                <a:solidFill>
-                  <a:srgbClr val="001D35"/>
-                </a:solidFill>
-                <a:latin typeface="Google Sans"/>
-                <a:ea typeface="Google Sans"/>
-              </a:rPr>
-              <a:t>Outcome:</a:t>
-            </a:r>
-            <a:endParaRPr sz="1600" b="1" i="0">
-              <a:solidFill>
-                <a:srgbClr val="001D35"/>
-              </a:solidFill>
-              <a:latin typeface="Google Sans"/>
-              <a:ea typeface="Google Sans"/>
-            </a:endParaRPr>
-          </a:p>
-          <a:p>
-            <a:pPr marL="0" indent="0">
-              <a:spcBef>
-                <a:spcPct val="0"/>
-              </a:spcBef>
-              <a:spcAft>
-                <a:spcPct val="0"/>
-              </a:spcAft>
-            </a:pPr>
-            <a:r>
-              <a:rPr sz="1600" b="0" i="0">
-                <a:solidFill>
-                  <a:srgbClr val="001D35"/>
-                </a:solidFill>
-                <a:latin typeface="Google Sans"/>
-                <a:ea typeface="Google Sans"/>
-              </a:rPr>
-              <a:t>Unpivot converts column names into a single "Attribute" column and the values into a "Value" column. </a:t>
-            </a:r>
-            <a:endParaRPr sz="1600" b="0" i="0">
-              <a:solidFill>
-                <a:srgbClr val="001D35"/>
-              </a:solidFill>
-              <a:latin typeface="Google Sans"/>
-              <a:ea typeface="Google Sans"/>
-            </a:endParaRPr>
-          </a:p>
-        </p:txBody>
-      </p:sp>
-      <p:sp>
-        <p:nvSpPr>
-          <p:cNvPr id="3" name="Text Box 2"/>
-          <p:cNvSpPr txBox="1"/>
-          <p:nvPr/>
-        </p:nvSpPr>
-        <p:spPr>
-          <a:xfrm>
-            <a:off x="825500" y="5995035"/>
-            <a:ext cx="6096000" cy="368300"/>
-          </a:xfrm>
-          <a:prstGeom prst="rect">
-            <a:avLst/>
-          </a:prstGeom>
-          <a:noFill/>
-        </p:spPr>
-        <p:txBody>
-          <a:bodyPr wrap="square" rtlCol="0" anchor="t">
-            <a:spAutoFit/>
-          </a:bodyPr>
-          <a:p>
-            <a:r>
-              <a:rPr lang="en-US" altLang="en-US"/>
-              <a:t>https://www.youtube.com/watch?v=pXrAXtLhDWU&amp;t=273</a:t>
-            </a:r>
-            <a:endParaRPr lang="en-US"/>
-          </a:p>
-        </p:txBody>
-      </p:sp>
-    </p:spTree>
-  </p:cSld>
-  <p:clrMapOvr>
-    <a:masterClrMapping/>
-  </p:clrMapOvr>
-</p:sld>
-</file>
-
-<file path=ppt/slides/slide29.xml><?xml version="1.0" encoding="utf-8"?>
-<p:sld xmlns:a="http://schemas.openxmlformats.org/drawingml/2006/main" xmlns:r="http://schemas.openxmlformats.org/officeDocument/2006/relationships" xmlns:p="http://schemas.openxmlformats.org/presentationml/2006/main">
-  <p:cSld>
-    <p:spTree>
-      <p:nvGrpSpPr>
-        <p:cNvPr id="1" name=""/>
-        <p:cNvGrpSpPr/>
-        <p:nvPr/>
-      </p:nvGrpSpPr>
-      <p:grpSpPr/>
-      <p:sp>
-        <p:nvSpPr>
-          <p:cNvPr id="2" name="Text Box 1"/>
-          <p:cNvSpPr txBox="1"/>
-          <p:nvPr/>
-        </p:nvSpPr>
-        <p:spPr>
-          <a:xfrm>
-            <a:off x="178435" y="271145"/>
-            <a:ext cx="11775440" cy="4874895"/>
-          </a:xfrm>
-          <a:prstGeom prst="rect">
-            <a:avLst/>
-          </a:prstGeom>
-        </p:spPr>
-        <p:txBody>
-          <a:bodyPr wrap="square">
-            <a:spAutoFit/>
-          </a:bodyPr>
-          <a:p>
-            <a:pPr marL="0" indent="0">
-              <a:spcBef>
-                <a:spcPct val="0"/>
-              </a:spcBef>
-              <a:spcAft>
-                <a:spcPts val="1000"/>
-              </a:spcAft>
-            </a:pPr>
-            <a:r>
-              <a:rPr lang="en-US" altLang="en-US" sz="1600" b="0" i="0">
-                <a:solidFill>
-                  <a:srgbClr val="001D35"/>
-                </a:solidFill>
-                <a:latin typeface="Arial" panose="020B0604020202020204" pitchFamily="34" charset="0"/>
-                <a:ea typeface="Google Sans"/>
-                <a:cs typeface="Arial" panose="020B0604020202020204" pitchFamily="34" charset="0"/>
-              </a:rPr>
-              <a:t>Drill Through in Power BI is a powerful feature that helps you dive deeper into your data without leaving your main report.</a:t>
-            </a:r>
-            <a:endParaRPr lang="en-US" altLang="en-US" sz="1600" b="0" i="0">
-              <a:solidFill>
-                <a:srgbClr val="001D35"/>
-              </a:solidFill>
-              <a:latin typeface="Arial" panose="020B0604020202020204" pitchFamily="34" charset="0"/>
-              <a:ea typeface="Google Sans"/>
-              <a:cs typeface="Arial" panose="020B0604020202020204" pitchFamily="34" charset="0"/>
-            </a:endParaRPr>
-          </a:p>
-          <a:p>
-            <a:pPr marL="0" indent="0">
-              <a:spcBef>
-                <a:spcPct val="0"/>
-              </a:spcBef>
-              <a:spcAft>
-                <a:spcPts val="1000"/>
-              </a:spcAft>
-            </a:pPr>
-            <a:endParaRPr sz="1600" b="0" i="0">
-              <a:solidFill>
-                <a:srgbClr val="001D35"/>
-              </a:solidFill>
-              <a:latin typeface="Arial" panose="020B0604020202020204" pitchFamily="34" charset="0"/>
-              <a:ea typeface="Google Sans"/>
-              <a:cs typeface="Arial" panose="020B0604020202020204" pitchFamily="34" charset="0"/>
-            </a:endParaRPr>
-          </a:p>
-          <a:p>
-            <a:pPr marL="0" indent="0">
-              <a:spcBef>
-                <a:spcPct val="0"/>
-              </a:spcBef>
-              <a:spcAft>
-                <a:spcPts val="1000"/>
-              </a:spcAft>
-            </a:pPr>
-            <a:r>
-              <a:rPr sz="1600" b="0" i="0">
-                <a:solidFill>
-                  <a:srgbClr val="001D35"/>
-                </a:solidFill>
-                <a:latin typeface="Arial" panose="020B0604020202020204" pitchFamily="34" charset="0"/>
-                <a:ea typeface="Google Sans"/>
-                <a:cs typeface="Arial" panose="020B0604020202020204" pitchFamily="34" charset="0"/>
-              </a:rPr>
-              <a:t>In Power BI, "drillthrough" allows users to navigate from a summary report page to a more detailed page, focusing on a specific data point, by right-clicking and selecting the drillthrough option. </a:t>
-            </a:r>
-            <a:endParaRPr sz="1600" b="0" i="0">
-              <a:solidFill>
-                <a:srgbClr val="001D35"/>
-              </a:solidFill>
-              <a:latin typeface="Arial" panose="020B0604020202020204" pitchFamily="34" charset="0"/>
-              <a:ea typeface="Google Sans"/>
-              <a:cs typeface="Arial" panose="020B0604020202020204" pitchFamily="34" charset="0"/>
-            </a:endParaRPr>
-          </a:p>
-          <a:p>
-            <a:pPr marL="0" indent="0">
-              <a:spcBef>
-                <a:spcPts val="1000"/>
-              </a:spcBef>
-              <a:spcAft>
-                <a:spcPts val="500"/>
-              </a:spcAft>
-            </a:pPr>
-            <a:r>
-              <a:rPr sz="1600" b="0" i="0">
-                <a:solidFill>
-                  <a:srgbClr val="001D35"/>
-                </a:solidFill>
-                <a:latin typeface="Arial" panose="020B0604020202020204" pitchFamily="34" charset="0"/>
-                <a:ea typeface="Google Sans"/>
-                <a:cs typeface="Arial" panose="020B0604020202020204" pitchFamily="34" charset="0"/>
-              </a:rPr>
-              <a:t>Here's a breakdown of how drillthrough works:</a:t>
-            </a:r>
-            <a:endParaRPr sz="1600" b="0" i="0">
-              <a:solidFill>
-                <a:srgbClr val="001D35"/>
-              </a:solidFill>
-              <a:latin typeface="Arial" panose="020B0604020202020204" pitchFamily="34" charset="0"/>
-              <a:ea typeface="Google Sans"/>
-              <a:cs typeface="Arial" panose="020B0604020202020204" pitchFamily="34" charset="0"/>
-            </a:endParaRPr>
-          </a:p>
-          <a:p>
-            <a:pPr marL="0" indent="0">
-              <a:spcBef>
-                <a:spcPct val="0"/>
-              </a:spcBef>
-              <a:spcAft>
-                <a:spcPts val="400"/>
-              </a:spcAft>
-              <a:buFont typeface="Arial" panose="020B0604020202020204"/>
-              <a:buChar char="•"/>
-            </a:pPr>
-            <a:r>
-              <a:rPr sz="1600" b="0" i="0">
-                <a:solidFill>
-                  <a:srgbClr val="001D35"/>
-                </a:solidFill>
-                <a:latin typeface="Arial" panose="020B0604020202020204" pitchFamily="34" charset="0"/>
-                <a:ea typeface="Google Sans"/>
-                <a:cs typeface="Arial" panose="020B0604020202020204" pitchFamily="34" charset="0"/>
-              </a:rPr>
-              <a:t>Purpose:</a:t>
-            </a:r>
-            <a:endParaRPr sz="1600" b="0" i="0">
-              <a:solidFill>
-                <a:srgbClr val="001D35"/>
-              </a:solidFill>
-              <a:latin typeface="Arial" panose="020B0604020202020204" pitchFamily="34" charset="0"/>
-              <a:ea typeface="Google Sans"/>
-              <a:cs typeface="Arial" panose="020B0604020202020204" pitchFamily="34" charset="0"/>
-            </a:endParaRPr>
-          </a:p>
-          <a:p>
-            <a:pPr marL="0" indent="0">
-              <a:spcBef>
-                <a:spcPct val="0"/>
-              </a:spcBef>
-              <a:spcAft>
-                <a:spcPts val="400"/>
-              </a:spcAft>
-            </a:pPr>
-            <a:r>
-              <a:rPr sz="1600" b="0" i="0">
-                <a:solidFill>
-                  <a:srgbClr val="001D35"/>
-                </a:solidFill>
-                <a:latin typeface="Arial" panose="020B0604020202020204" pitchFamily="34" charset="0"/>
-                <a:ea typeface="Google Sans"/>
-                <a:cs typeface="Arial" panose="020B0604020202020204" pitchFamily="34" charset="0"/>
-              </a:rPr>
-              <a:t>Drillthrough enables users to explore data in more detail by moving from a summary view to a page with specific context. </a:t>
-            </a:r>
-            <a:endParaRPr sz="1600" b="0" i="0">
-              <a:solidFill>
-                <a:srgbClr val="001D35"/>
-              </a:solidFill>
-              <a:latin typeface="Arial" panose="020B0604020202020204" pitchFamily="34" charset="0"/>
-              <a:ea typeface="Google Sans"/>
-              <a:cs typeface="Arial" panose="020B0604020202020204" pitchFamily="34" charset="0"/>
-            </a:endParaRPr>
-          </a:p>
-          <a:p>
-            <a:pPr marL="0" indent="0">
-              <a:spcBef>
-                <a:spcPct val="0"/>
-              </a:spcBef>
-              <a:spcAft>
-                <a:spcPts val="400"/>
-              </a:spcAft>
-              <a:buFont typeface="Arial" panose="020B0604020202020204"/>
-              <a:buChar char="•"/>
-            </a:pPr>
-            <a:r>
-              <a:rPr sz="1600" b="0" i="0">
-                <a:solidFill>
-                  <a:srgbClr val="001D35"/>
-                </a:solidFill>
-                <a:latin typeface="Arial" panose="020B0604020202020204" pitchFamily="34" charset="0"/>
-                <a:ea typeface="Google Sans"/>
-                <a:cs typeface="Arial" panose="020B0604020202020204" pitchFamily="34" charset="0"/>
-              </a:rPr>
-              <a:t>How it works:</a:t>
-            </a:r>
-            <a:endParaRPr sz="1600" b="0" i="0">
-              <a:solidFill>
-                <a:srgbClr val="001D35"/>
-              </a:solidFill>
-              <a:latin typeface="Arial" panose="020B0604020202020204" pitchFamily="34" charset="0"/>
-              <a:ea typeface="Google Sans"/>
-              <a:cs typeface="Arial" panose="020B0604020202020204" pitchFamily="34" charset="0"/>
-            </a:endParaRPr>
-          </a:p>
-          <a:p>
-            <a:pPr marL="0" lvl="1" indent="0">
-              <a:spcBef>
-                <a:spcPts val="400"/>
-              </a:spcBef>
-              <a:spcAft>
-                <a:spcPts val="400"/>
-              </a:spcAft>
-              <a:buFont typeface="Arial" panose="020B0604020202020204"/>
-              <a:buChar char="◦"/>
-            </a:pPr>
-            <a:r>
-              <a:rPr sz="1600" b="0" i="0">
-                <a:solidFill>
-                  <a:srgbClr val="001D35"/>
-                </a:solidFill>
-                <a:latin typeface="Arial" panose="020B0604020202020204" pitchFamily="34" charset="0"/>
-                <a:ea typeface="Google Sans"/>
-                <a:cs typeface="Arial" panose="020B0604020202020204" pitchFamily="34" charset="0"/>
-              </a:rPr>
-              <a:t>Source Visual: You start on a report page with a visual containing summary data. </a:t>
-            </a:r>
-            <a:endParaRPr sz="1600" b="0" i="0">
-              <a:solidFill>
-                <a:srgbClr val="001D35"/>
-              </a:solidFill>
-              <a:latin typeface="Arial" panose="020B0604020202020204" pitchFamily="34" charset="0"/>
-              <a:ea typeface="Google Sans"/>
-              <a:cs typeface="Arial" panose="020B0604020202020204" pitchFamily="34" charset="0"/>
-            </a:endParaRPr>
-          </a:p>
-          <a:p>
-            <a:pPr marL="0" lvl="1" indent="0">
-              <a:spcBef>
-                <a:spcPts val="400"/>
-              </a:spcBef>
-              <a:spcAft>
-                <a:spcPts val="400"/>
-              </a:spcAft>
-              <a:buFont typeface="Arial" panose="020B0604020202020204"/>
-              <a:buChar char="◦"/>
-            </a:pPr>
-            <a:r>
-              <a:rPr sz="1600" b="0" i="0">
-                <a:solidFill>
-                  <a:srgbClr val="001D35"/>
-                </a:solidFill>
-                <a:latin typeface="Arial" panose="020B0604020202020204" pitchFamily="34" charset="0"/>
-                <a:ea typeface="Google Sans"/>
-                <a:cs typeface="Arial" panose="020B0604020202020204" pitchFamily="34" charset="0"/>
-              </a:rPr>
-              <a:t>Drillthrough Target: You create a destination page (or "drillthrough page") that focuses on a specific entity or data point. </a:t>
-            </a:r>
-            <a:endParaRPr sz="1600" b="0" i="0">
-              <a:solidFill>
-                <a:srgbClr val="001D35"/>
-              </a:solidFill>
-              <a:latin typeface="Arial" panose="020B0604020202020204" pitchFamily="34" charset="0"/>
-              <a:ea typeface="Google Sans"/>
-              <a:cs typeface="Arial" panose="020B0604020202020204" pitchFamily="34" charset="0"/>
-            </a:endParaRPr>
-          </a:p>
-          <a:p>
-            <a:pPr marL="0" lvl="1" indent="0">
-              <a:spcBef>
-                <a:spcPts val="400"/>
-              </a:spcBef>
-              <a:spcAft>
-                <a:spcPts val="400"/>
-              </a:spcAft>
-              <a:buFont typeface="Arial" panose="020B0604020202020204"/>
-              <a:buChar char="◦"/>
-            </a:pPr>
-            <a:r>
-              <a:rPr sz="1600" b="0" i="0">
-                <a:solidFill>
-                  <a:srgbClr val="001D35"/>
-                </a:solidFill>
-                <a:latin typeface="Arial" panose="020B0604020202020204" pitchFamily="34" charset="0"/>
-                <a:ea typeface="Google Sans"/>
-                <a:cs typeface="Arial" panose="020B0604020202020204" pitchFamily="34" charset="0"/>
-              </a:rPr>
-              <a:t>Initiating Drillthrough: When a user right-clicks a data point in the source visual, they can select the "Drillthrough" option to navigate to the target page. </a:t>
-            </a:r>
-            <a:endParaRPr sz="1600" b="0" i="0">
-              <a:solidFill>
-                <a:srgbClr val="001D35"/>
-              </a:solidFill>
-              <a:latin typeface="Arial" panose="020B0604020202020204" pitchFamily="34" charset="0"/>
-              <a:ea typeface="Google Sans"/>
-              <a:cs typeface="Arial" panose="020B0604020202020204" pitchFamily="34" charset="0"/>
-            </a:endParaRPr>
-          </a:p>
-          <a:p>
-            <a:pPr marL="0" lvl="1" indent="0">
-              <a:spcBef>
-                <a:spcPts val="400"/>
-              </a:spcBef>
-              <a:spcAft>
-                <a:spcPct val="0"/>
-              </a:spcAft>
-              <a:buFont typeface="Arial" panose="020B0604020202020204"/>
-              <a:buChar char="◦"/>
-            </a:pPr>
-            <a:r>
-              <a:rPr sz="1600" b="0" i="0">
-                <a:solidFill>
-                  <a:srgbClr val="001D35"/>
-                </a:solidFill>
-                <a:latin typeface="Arial" panose="020B0604020202020204" pitchFamily="34" charset="0"/>
-                <a:ea typeface="Google Sans"/>
-                <a:cs typeface="Arial" panose="020B0604020202020204" pitchFamily="34" charset="0"/>
-              </a:rPr>
-              <a:t>Contextual Filtering: The target page will be filtered to show only the data related to the selected data point, providing a detailed view. </a:t>
-            </a:r>
-            <a:endParaRPr sz="1600" b="0" i="0">
-              <a:solidFill>
-                <a:srgbClr val="001D35"/>
-              </a:solidFill>
-              <a:latin typeface="Arial" panose="020B0604020202020204" pitchFamily="34" charset="0"/>
-              <a:ea typeface="Google Sans"/>
-              <a:cs typeface="Arial" panose="020B0604020202020204" pitchFamily="34" charset="0"/>
-            </a:endParaRPr>
-          </a:p>
-          <a:p>
-            <a:pPr marL="0" indent="0">
-              <a:spcBef>
-                <a:spcPct val="0"/>
-              </a:spcBef>
-              <a:spcAft>
-                <a:spcPts val="400"/>
-              </a:spcAft>
-              <a:buFont typeface="Arial" panose="020B0604020202020204"/>
-              <a:buNone/>
-            </a:pPr>
-            <a:endParaRPr sz="1600" b="0" i="0">
-              <a:solidFill>
-                <a:srgbClr val="001D35"/>
-              </a:solidFill>
-              <a:latin typeface="Arial" panose="020B0604020202020204" pitchFamily="34" charset="0"/>
-              <a:ea typeface="Google Sans"/>
-              <a:cs typeface="Arial" panose="020B0604020202020204" pitchFamily="34" charset="0"/>
             </a:endParaRPr>
           </a:p>
         </p:txBody>
@@ -11034,6 +9469,1988 @@
       <p:grpSpPr/>
       <p:sp>
         <p:nvSpPr>
+          <p:cNvPr id="3" name="Text Box 2"/>
+          <p:cNvSpPr txBox="1"/>
+          <p:nvPr/>
+        </p:nvSpPr>
+        <p:spPr>
+          <a:xfrm>
+            <a:off x="444500" y="113665"/>
+            <a:ext cx="9356725" cy="1137285"/>
+          </a:xfrm>
+          <a:prstGeom prst="rect">
+            <a:avLst/>
+          </a:prstGeom>
+        </p:spPr>
+        <p:txBody>
+          <a:bodyPr wrap="square">
+            <a:spAutoFit/>
+          </a:bodyPr>
+          <a:p>
+            <a:pPr marL="0" indent="0"/>
+            <a:r>
+              <a:rPr sz="2000" b="1" i="0">
+                <a:solidFill>
+                  <a:srgbClr val="001D35"/>
+                </a:solidFill>
+                <a:latin typeface="Google Sans"/>
+                <a:ea typeface="Google Sans"/>
+              </a:rPr>
+              <a:t>Row-Level Security (RLS)</a:t>
+            </a:r>
+            <a:r>
+              <a:rPr sz="1600" b="0" i="0">
+                <a:solidFill>
+                  <a:srgbClr val="001D35"/>
+                </a:solidFill>
+                <a:latin typeface="Google Sans"/>
+                <a:ea typeface="Google Sans"/>
+              </a:rPr>
+              <a:t> in Power BI allows you to restrict data access at the row level, ensuring that users only see the data they are authorized to view, based on their roles or permissions. You can define roles and rules within Power BI Desktop and publish them to the Power BI service to configure RLS. </a:t>
+            </a:r>
+            <a:endParaRPr sz="1600" b="0" i="0">
+              <a:solidFill>
+                <a:srgbClr val="001D35"/>
+              </a:solidFill>
+              <a:latin typeface="Google Sans"/>
+              <a:ea typeface="Google Sans"/>
+            </a:endParaRPr>
+          </a:p>
+        </p:txBody>
+      </p:sp>
+      <p:sp>
+        <p:nvSpPr>
+          <p:cNvPr id="4" name="Text Box 3"/>
+          <p:cNvSpPr txBox="1"/>
+          <p:nvPr/>
+        </p:nvSpPr>
+        <p:spPr>
+          <a:xfrm>
+            <a:off x="444500" y="1250950"/>
+            <a:ext cx="10919460" cy="4730750"/>
+          </a:xfrm>
+          <a:prstGeom prst="rect">
+            <a:avLst/>
+          </a:prstGeom>
+        </p:spPr>
+        <p:txBody>
+          <a:bodyPr wrap="square">
+            <a:spAutoFit/>
+          </a:bodyPr>
+          <a:p>
+            <a:pPr marL="0" indent="0">
+              <a:spcBef>
+                <a:spcPts val="1000"/>
+              </a:spcBef>
+              <a:spcAft>
+                <a:spcPts val="500"/>
+              </a:spcAft>
+            </a:pPr>
+            <a:r>
+              <a:rPr b="1" i="0">
+                <a:solidFill>
+                  <a:srgbClr val="001D35"/>
+                </a:solidFill>
+                <a:latin typeface="Google Sans"/>
+                <a:ea typeface="Google Sans"/>
+              </a:rPr>
+              <a:t>How to Implement RLS in Power BI:</a:t>
+            </a:r>
+            <a:endParaRPr b="1" i="0">
+              <a:solidFill>
+                <a:srgbClr val="001D35"/>
+              </a:solidFill>
+              <a:latin typeface="Google Sans"/>
+              <a:ea typeface="Google Sans"/>
+            </a:endParaRPr>
+          </a:p>
+          <a:p>
+            <a:pPr marL="0" indent="0">
+              <a:spcBef>
+                <a:spcPct val="0"/>
+              </a:spcBef>
+              <a:spcAft>
+                <a:spcPts val="400"/>
+              </a:spcAft>
+              <a:buAutoNum type="arabicPeriod"/>
+            </a:pPr>
+            <a:r>
+              <a:rPr sz="1600" b="0" i="0">
+                <a:solidFill>
+                  <a:srgbClr val="001D35"/>
+                </a:solidFill>
+                <a:latin typeface="Google Sans"/>
+                <a:ea typeface="Google Sans"/>
+              </a:rPr>
+              <a:t>Define Roles and Rules in Power BI Desktop:</a:t>
+            </a:r>
+            <a:endParaRPr sz="1600" b="0" i="0">
+              <a:solidFill>
+                <a:srgbClr val="001D35"/>
+              </a:solidFill>
+              <a:latin typeface="Google Sans"/>
+              <a:ea typeface="Google Sans"/>
+            </a:endParaRPr>
+          </a:p>
+          <a:p>
+            <a:pPr marL="0" lvl="1" indent="0">
+              <a:spcBef>
+                <a:spcPct val="0"/>
+              </a:spcBef>
+              <a:spcAft>
+                <a:spcPts val="400"/>
+              </a:spcAft>
+              <a:buFont typeface="Arial" panose="020B0604020202020204"/>
+              <a:buChar char="◦"/>
+            </a:pPr>
+            <a:r>
+              <a:rPr sz="1600" b="0" i="0">
+                <a:solidFill>
+                  <a:srgbClr val="001D35"/>
+                </a:solidFill>
+                <a:latin typeface="Google Sans"/>
+                <a:ea typeface="Google Sans"/>
+              </a:rPr>
+              <a:t>Create Roles: In the Power BI Desktop modeling view, go to "Manage Roles" and create the necessary roles. </a:t>
+            </a:r>
+            <a:endParaRPr sz="1600" b="0" i="0">
+              <a:solidFill>
+                <a:srgbClr val="001D35"/>
+              </a:solidFill>
+              <a:latin typeface="Google Sans"/>
+              <a:ea typeface="Google Sans"/>
+            </a:endParaRPr>
+          </a:p>
+          <a:p>
+            <a:pPr marL="0" lvl="1" indent="0">
+              <a:spcBef>
+                <a:spcPct val="0"/>
+              </a:spcBef>
+              <a:spcAft>
+                <a:spcPts val="400"/>
+              </a:spcAft>
+              <a:buFont typeface="Arial" panose="020B0604020202020204"/>
+              <a:buChar char="◦"/>
+            </a:pPr>
+            <a:r>
+              <a:rPr sz="1600" b="0" i="0">
+                <a:solidFill>
+                  <a:srgbClr val="001D35"/>
+                </a:solidFill>
+                <a:latin typeface="Google Sans"/>
+                <a:ea typeface="Google Sans"/>
+              </a:rPr>
+              <a:t>Define DAX Expressions: For each role, define a DAX expression (Data Analysis Expressions) that filters the data based on the role's requirements. </a:t>
+            </a:r>
+            <a:endParaRPr sz="1600" b="0" i="0">
+              <a:solidFill>
+                <a:srgbClr val="001D35"/>
+              </a:solidFill>
+              <a:latin typeface="Google Sans"/>
+              <a:ea typeface="Google Sans"/>
+            </a:endParaRPr>
+          </a:p>
+          <a:p>
+            <a:pPr marL="0" lvl="1" indent="0">
+              <a:spcBef>
+                <a:spcPct val="0"/>
+              </a:spcBef>
+              <a:spcAft>
+                <a:spcPct val="0"/>
+              </a:spcAft>
+              <a:buFont typeface="Arial" panose="020B0604020202020204"/>
+              <a:buChar char="◦"/>
+            </a:pPr>
+            <a:r>
+              <a:rPr sz="1600" b="0" i="0">
+                <a:solidFill>
+                  <a:srgbClr val="001D35"/>
+                </a:solidFill>
+                <a:latin typeface="Google Sans"/>
+                <a:ea typeface="Google Sans"/>
+              </a:rPr>
+              <a:t>Example: A DAX expression could check the "Region" column and only show data for the current user's region. </a:t>
+            </a:r>
+            <a:endParaRPr sz="1600" b="0" i="0">
+              <a:solidFill>
+                <a:srgbClr val="001D35"/>
+              </a:solidFill>
+              <a:latin typeface="Google Sans"/>
+              <a:ea typeface="Google Sans"/>
+            </a:endParaRPr>
+          </a:p>
+          <a:p>
+            <a:pPr marL="0" indent="0">
+              <a:spcBef>
+                <a:spcPct val="0"/>
+              </a:spcBef>
+              <a:spcAft>
+                <a:spcPts val="400"/>
+              </a:spcAft>
+              <a:buAutoNum type="arabicPeriod"/>
+            </a:pPr>
+            <a:r>
+              <a:rPr sz="1600" b="0" i="0">
+                <a:solidFill>
+                  <a:srgbClr val="001D35"/>
+                </a:solidFill>
+                <a:latin typeface="Google Sans"/>
+                <a:ea typeface="Google Sans"/>
+              </a:rPr>
+              <a:t>Publish to Power BI Service:</a:t>
+            </a:r>
+            <a:endParaRPr sz="1600" b="0" i="0">
+              <a:solidFill>
+                <a:srgbClr val="001D35"/>
+              </a:solidFill>
+              <a:latin typeface="Google Sans"/>
+              <a:ea typeface="Google Sans"/>
+            </a:endParaRPr>
+          </a:p>
+          <a:p>
+            <a:pPr marL="0" lvl="1" indent="0">
+              <a:spcBef>
+                <a:spcPct val="0"/>
+              </a:spcBef>
+              <a:spcAft>
+                <a:spcPts val="400"/>
+              </a:spcAft>
+              <a:buFont typeface="Arial" panose="020B0604020202020204"/>
+              <a:buChar char="◦"/>
+            </a:pPr>
+            <a:r>
+              <a:rPr sz="1600" b="0" i="0">
+                <a:solidFill>
+                  <a:srgbClr val="001D35"/>
+                </a:solidFill>
+                <a:latin typeface="Google Sans"/>
+                <a:ea typeface="Google Sans"/>
+              </a:rPr>
+              <a:t>Publish your Power BI report to the Power BI service. </a:t>
+            </a:r>
+            <a:endParaRPr sz="1600" b="0" i="0">
+              <a:solidFill>
+                <a:srgbClr val="001D35"/>
+              </a:solidFill>
+              <a:latin typeface="Google Sans"/>
+              <a:ea typeface="Google Sans"/>
+            </a:endParaRPr>
+          </a:p>
+          <a:p>
+            <a:pPr marL="0" lvl="1" indent="0">
+              <a:spcBef>
+                <a:spcPct val="0"/>
+              </a:spcBef>
+              <a:spcAft>
+                <a:spcPct val="0"/>
+              </a:spcAft>
+              <a:buFont typeface="Arial" panose="020B0604020202020204"/>
+              <a:buChar char="◦"/>
+            </a:pPr>
+            <a:r>
+              <a:rPr sz="1600" b="0" i="0">
+                <a:solidFill>
+                  <a:srgbClr val="001D35"/>
+                </a:solidFill>
+                <a:latin typeface="Google Sans"/>
+                <a:ea typeface="Google Sans"/>
+              </a:rPr>
+              <a:t>The role definitions and DAX expressions are also published. </a:t>
+            </a:r>
+            <a:endParaRPr sz="1600" b="0" i="0">
+              <a:solidFill>
+                <a:srgbClr val="001D35"/>
+              </a:solidFill>
+              <a:latin typeface="Google Sans"/>
+              <a:ea typeface="Google Sans"/>
+            </a:endParaRPr>
+          </a:p>
+          <a:p>
+            <a:pPr marL="0" indent="0">
+              <a:spcBef>
+                <a:spcPct val="0"/>
+              </a:spcBef>
+              <a:spcAft>
+                <a:spcPts val="400"/>
+              </a:spcAft>
+              <a:buAutoNum type="arabicPeriod"/>
+            </a:pPr>
+            <a:r>
+              <a:rPr sz="1600" b="0" i="0">
+                <a:solidFill>
+                  <a:srgbClr val="001D35"/>
+                </a:solidFill>
+                <a:latin typeface="Google Sans"/>
+                <a:ea typeface="Google Sans"/>
+              </a:rPr>
+              <a:t>Assign Users to Roles:</a:t>
+            </a:r>
+            <a:endParaRPr sz="1600" b="0" i="0">
+              <a:solidFill>
+                <a:srgbClr val="001D35"/>
+              </a:solidFill>
+              <a:latin typeface="Google Sans"/>
+              <a:ea typeface="Google Sans"/>
+            </a:endParaRPr>
+          </a:p>
+          <a:p>
+            <a:pPr marL="0" lvl="1" indent="0">
+              <a:spcBef>
+                <a:spcPct val="0"/>
+              </a:spcBef>
+              <a:spcAft>
+                <a:spcPts val="400"/>
+              </a:spcAft>
+              <a:buFont typeface="Arial" panose="020B0604020202020204"/>
+              <a:buChar char="◦"/>
+            </a:pPr>
+            <a:r>
+              <a:rPr sz="1600" b="0" i="0">
+                <a:solidFill>
+                  <a:srgbClr val="001D35"/>
+                </a:solidFill>
+                <a:latin typeface="Google Sans"/>
+                <a:ea typeface="Google Sans"/>
+              </a:rPr>
+              <a:t>In the Power BI service, you can assign users to the roles you created. </a:t>
+            </a:r>
+            <a:endParaRPr sz="1600" b="0" i="0">
+              <a:solidFill>
+                <a:srgbClr val="001D35"/>
+              </a:solidFill>
+              <a:latin typeface="Google Sans"/>
+              <a:ea typeface="Google Sans"/>
+            </a:endParaRPr>
+          </a:p>
+          <a:p>
+            <a:pPr marL="0" lvl="1" indent="0">
+              <a:spcBef>
+                <a:spcPct val="0"/>
+              </a:spcBef>
+              <a:spcAft>
+                <a:spcPct val="0"/>
+              </a:spcAft>
+              <a:buFont typeface="Arial" panose="020B0604020202020204"/>
+              <a:buChar char="◦"/>
+            </a:pPr>
+            <a:r>
+              <a:rPr sz="1600" b="0" i="0">
+                <a:solidFill>
+                  <a:srgbClr val="001D35"/>
+                </a:solidFill>
+                <a:latin typeface="Google Sans"/>
+                <a:ea typeface="Google Sans"/>
+              </a:rPr>
+              <a:t>Only semantic model owners or workspace admins can add members to roles. </a:t>
+            </a:r>
+            <a:endParaRPr sz="1600" b="0" i="0">
+              <a:solidFill>
+                <a:srgbClr val="001D35"/>
+              </a:solidFill>
+              <a:latin typeface="Google Sans"/>
+              <a:ea typeface="Google Sans"/>
+            </a:endParaRPr>
+          </a:p>
+          <a:p>
+            <a:pPr marL="0" indent="0">
+              <a:spcBef>
+                <a:spcPct val="0"/>
+              </a:spcBef>
+              <a:spcAft>
+                <a:spcPct val="0"/>
+              </a:spcAft>
+              <a:buAutoNum type="arabicPeriod"/>
+            </a:pPr>
+            <a:r>
+              <a:rPr sz="1600" b="0" i="0">
+                <a:solidFill>
+                  <a:srgbClr val="001D35"/>
+                </a:solidFill>
+                <a:latin typeface="Google Sans"/>
+                <a:ea typeface="Google Sans"/>
+              </a:rPr>
+              <a:t>Test the Security:</a:t>
+            </a:r>
+            <a:endParaRPr sz="1600" b="0" i="0">
+              <a:solidFill>
+                <a:srgbClr val="001D35"/>
+              </a:solidFill>
+              <a:latin typeface="Google Sans"/>
+              <a:ea typeface="Google Sans"/>
+            </a:endParaRPr>
+          </a:p>
+          <a:p>
+            <a:pPr marL="0" lvl="1" indent="0">
+              <a:spcBef>
+                <a:spcPct val="0"/>
+              </a:spcBef>
+              <a:spcAft>
+                <a:spcPct val="0"/>
+              </a:spcAft>
+              <a:buFont typeface="Arial" panose="020B0604020202020204"/>
+              <a:buChar char="◦"/>
+            </a:pPr>
+            <a:r>
+              <a:rPr sz="1600" b="0" i="0">
+                <a:solidFill>
+                  <a:srgbClr val="001D35"/>
+                </a:solidFill>
+                <a:latin typeface="Google Sans"/>
+                <a:ea typeface="Google Sans"/>
+              </a:rPr>
+              <a:t>Test the security by logging in as different users and verifying that they only see the data they are authorized to view. </a:t>
+            </a:r>
+            <a:endParaRPr sz="1600" b="0" i="0">
+              <a:solidFill>
+                <a:srgbClr val="001D35"/>
+              </a:solidFill>
+              <a:latin typeface="Google Sans"/>
+              <a:ea typeface="Google Sans"/>
+            </a:endParaRPr>
+          </a:p>
+        </p:txBody>
+      </p:sp>
+      <p:sp>
+        <p:nvSpPr>
+          <p:cNvPr id="5" name="Text Box 4"/>
+          <p:cNvSpPr txBox="1"/>
+          <p:nvPr/>
+        </p:nvSpPr>
+        <p:spPr>
+          <a:xfrm>
+            <a:off x="522605" y="5981700"/>
+            <a:ext cx="6096000" cy="368300"/>
+          </a:xfrm>
+          <a:prstGeom prst="rect">
+            <a:avLst/>
+          </a:prstGeom>
+          <a:noFill/>
+        </p:spPr>
+        <p:txBody>
+          <a:bodyPr wrap="square" rtlCol="0" anchor="t">
+            <a:spAutoFit/>
+          </a:bodyPr>
+          <a:p>
+            <a:r>
+              <a:rPr lang="en-US" altLang="en-US">
+                <a:solidFill>
+                  <a:srgbClr val="00B0F0"/>
+                </a:solidFill>
+              </a:rPr>
+              <a:t>https://www.edureka.co/blog/row-level-security-in-power-bi/</a:t>
+            </a:r>
+            <a:endParaRPr lang="en-US" altLang="en-US">
+              <a:solidFill>
+                <a:srgbClr val="00B0F0"/>
+              </a:solidFill>
+            </a:endParaRPr>
+          </a:p>
+        </p:txBody>
+      </p:sp>
+    </p:spTree>
+  </p:cSld>
+  <p:clrMapOvr>
+    <a:masterClrMapping/>
+  </p:clrMapOvr>
+</p:sld>
+</file>
+
+<file path=ppt/slides/slide31.xml><?xml version="1.0" encoding="utf-8"?>
+<p:sld xmlns:a="http://schemas.openxmlformats.org/drawingml/2006/main" xmlns:r="http://schemas.openxmlformats.org/officeDocument/2006/relationships" xmlns:p="http://schemas.openxmlformats.org/presentationml/2006/main">
+  <p:cSld>
+    <p:spTree>
+      <p:nvGrpSpPr>
+        <p:cNvPr id="1" name=""/>
+        <p:cNvGrpSpPr/>
+        <p:nvPr/>
+      </p:nvGrpSpPr>
+      <p:grpSpPr/>
+      <p:sp>
+        <p:nvSpPr>
+          <p:cNvPr id="2" name="Text Box 1"/>
+          <p:cNvSpPr txBox="1"/>
+          <p:nvPr/>
+        </p:nvSpPr>
+        <p:spPr>
+          <a:xfrm>
+            <a:off x="746760" y="457200"/>
+            <a:ext cx="6096000" cy="1981200"/>
+          </a:xfrm>
+          <a:prstGeom prst="rect">
+            <a:avLst/>
+          </a:prstGeom>
+          <a:noFill/>
+        </p:spPr>
+        <p:txBody>
+          <a:bodyPr wrap="square" rtlCol="0" anchor="t">
+            <a:spAutoFit/>
+          </a:bodyPr>
+          <a:p>
+            <a:pPr marL="0" indent="0">
+              <a:spcBef>
+                <a:spcPts val="1000"/>
+              </a:spcBef>
+              <a:spcAft>
+                <a:spcPts val="500"/>
+              </a:spcAft>
+            </a:pPr>
+            <a:r>
+              <a:rPr sz="1600">
+                <a:solidFill>
+                  <a:srgbClr val="001D35"/>
+                </a:solidFill>
+                <a:latin typeface="Google Sans"/>
+                <a:ea typeface="Google Sans"/>
+                <a:sym typeface="+mn-ea"/>
+              </a:rPr>
+              <a:t>Types of RLS:</a:t>
+            </a:r>
+            <a:endParaRPr sz="1600" b="0" i="0">
+              <a:solidFill>
+                <a:srgbClr val="001D35"/>
+              </a:solidFill>
+              <a:latin typeface="Google Sans"/>
+              <a:ea typeface="Google Sans"/>
+            </a:endParaRPr>
+          </a:p>
+          <a:p>
+            <a:pPr marL="0" indent="0">
+              <a:spcBef>
+                <a:spcPct val="0"/>
+              </a:spcBef>
+              <a:spcAft>
+                <a:spcPts val="400"/>
+              </a:spcAft>
+              <a:buFont typeface="Arial" panose="020B0604020202020204"/>
+              <a:buChar char="•"/>
+            </a:pPr>
+            <a:r>
+              <a:rPr sz="1600">
+                <a:solidFill>
+                  <a:srgbClr val="001D35"/>
+                </a:solidFill>
+                <a:latin typeface="Google Sans"/>
+                <a:ea typeface="Google Sans"/>
+                <a:sym typeface="+mn-ea"/>
+              </a:rPr>
+              <a:t>Static RLS:</a:t>
+            </a:r>
+            <a:endParaRPr sz="1600" b="0" i="0">
+              <a:solidFill>
+                <a:srgbClr val="001D35"/>
+              </a:solidFill>
+              <a:latin typeface="Google Sans"/>
+              <a:ea typeface="Google Sans"/>
+            </a:endParaRPr>
+          </a:p>
+          <a:p>
+            <a:pPr marL="0" indent="0">
+              <a:spcBef>
+                <a:spcPct val="0"/>
+              </a:spcBef>
+              <a:spcAft>
+                <a:spcPts val="400"/>
+              </a:spcAft>
+            </a:pPr>
+            <a:r>
+              <a:rPr sz="1600">
+                <a:solidFill>
+                  <a:srgbClr val="001D35"/>
+                </a:solidFill>
+                <a:latin typeface="Google Sans"/>
+                <a:ea typeface="Google Sans"/>
+                <a:sym typeface="+mn-ea"/>
+              </a:rPr>
+              <a:t>Security logic is hardcoded within the PBIX file and doesn't change dynamically. </a:t>
+            </a:r>
+            <a:endParaRPr sz="1600" b="0" i="0">
+              <a:solidFill>
+                <a:srgbClr val="001D35"/>
+              </a:solidFill>
+              <a:latin typeface="Google Sans"/>
+              <a:ea typeface="Google Sans"/>
+            </a:endParaRPr>
+          </a:p>
+          <a:p>
+            <a:pPr marL="0" indent="0">
+              <a:spcBef>
+                <a:spcPct val="0"/>
+              </a:spcBef>
+              <a:spcAft>
+                <a:spcPct val="0"/>
+              </a:spcAft>
+              <a:buFont typeface="Arial" panose="020B0604020202020204"/>
+              <a:buChar char="•"/>
+            </a:pPr>
+            <a:r>
+              <a:rPr sz="1600">
+                <a:solidFill>
+                  <a:srgbClr val="001D35"/>
+                </a:solidFill>
+                <a:latin typeface="Google Sans"/>
+                <a:ea typeface="Google Sans"/>
+                <a:sym typeface="+mn-ea"/>
+              </a:rPr>
+              <a:t>Dynamic RLS:</a:t>
+            </a:r>
+            <a:endParaRPr sz="1600" b="0" i="0">
+              <a:solidFill>
+                <a:srgbClr val="001D35"/>
+              </a:solidFill>
+              <a:latin typeface="Google Sans"/>
+              <a:ea typeface="Google Sans"/>
+            </a:endParaRPr>
+          </a:p>
+          <a:p>
+            <a:pPr marL="0" indent="0">
+              <a:spcBef>
+                <a:spcPct val="0"/>
+              </a:spcBef>
+              <a:spcAft>
+                <a:spcPct val="0"/>
+              </a:spcAft>
+            </a:pPr>
+            <a:r>
+              <a:rPr sz="1600">
+                <a:solidFill>
+                  <a:srgbClr val="001D35"/>
+                </a:solidFill>
+                <a:latin typeface="Google Sans"/>
+                <a:ea typeface="Google Sans"/>
+                <a:sym typeface="+mn-ea"/>
+              </a:rPr>
+              <a:t>Security logic can be adjusted based on the user's context (e.g., their username or role). </a:t>
+            </a:r>
+            <a:endParaRPr lang="en-US" sz="1600">
+              <a:solidFill>
+                <a:srgbClr val="001D35"/>
+              </a:solidFill>
+              <a:latin typeface="Google Sans"/>
+              <a:ea typeface="Google Sans"/>
+              <a:sym typeface="+mn-ea"/>
+            </a:endParaRPr>
+          </a:p>
+        </p:txBody>
+      </p:sp>
+      <p:sp>
+        <p:nvSpPr>
+          <p:cNvPr id="4" name="Text Box 3"/>
+          <p:cNvSpPr txBox="1"/>
+          <p:nvPr/>
+        </p:nvSpPr>
+        <p:spPr>
+          <a:xfrm>
+            <a:off x="434340" y="3106420"/>
+            <a:ext cx="8709660" cy="368300"/>
+          </a:xfrm>
+          <a:prstGeom prst="rect">
+            <a:avLst/>
+          </a:prstGeom>
+          <a:noFill/>
+        </p:spPr>
+        <p:txBody>
+          <a:bodyPr wrap="square" rtlCol="0" anchor="t">
+            <a:spAutoFit/>
+          </a:bodyPr>
+          <a:p>
+            <a:r>
+              <a:rPr lang="en-US" altLang="en-US"/>
+              <a:t>https://learn.microsoft.com/en-us/fabric/security/service-admin-row-level-security</a:t>
+            </a:r>
+            <a:endParaRPr lang="en-US"/>
+          </a:p>
+        </p:txBody>
+      </p:sp>
+    </p:spTree>
+  </p:cSld>
+  <p:clrMapOvr>
+    <a:masterClrMapping/>
+  </p:clrMapOvr>
+</p:sld>
+</file>
+
+<file path=ppt/slides/slide32.xml><?xml version="1.0" encoding="utf-8"?>
+<p:sld xmlns:a="http://schemas.openxmlformats.org/drawingml/2006/main" xmlns:r="http://schemas.openxmlformats.org/officeDocument/2006/relationships" xmlns:p="http://schemas.openxmlformats.org/presentationml/2006/main">
+  <p:cSld>
+    <p:spTree>
+      <p:nvGrpSpPr>
+        <p:cNvPr id="1" name=""/>
+        <p:cNvGrpSpPr/>
+        <p:nvPr/>
+      </p:nvGrpSpPr>
+      <p:grpSpPr/>
+      <p:sp>
+        <p:nvSpPr>
+          <p:cNvPr id="2" name="Text Box 1"/>
+          <p:cNvSpPr txBox="1"/>
+          <p:nvPr/>
+        </p:nvSpPr>
+        <p:spPr>
+          <a:xfrm>
+            <a:off x="657225" y="571500"/>
+            <a:ext cx="9698355" cy="2614930"/>
+          </a:xfrm>
+          <a:prstGeom prst="rect">
+            <a:avLst/>
+          </a:prstGeom>
+          <a:noFill/>
+        </p:spPr>
+        <p:txBody>
+          <a:bodyPr wrap="square" rtlCol="0">
+            <a:spAutoFit/>
+          </a:bodyPr>
+          <a:p>
+            <a:r>
+              <a:rPr lang="en-IN" altLang="en-US" sz="2000" b="1">
+                <a:solidFill>
+                  <a:srgbClr val="C00000"/>
+                </a:solidFill>
+                <a:effectLst>
+                  <a:outerShdw blurRad="38100" dist="38100" dir="2700000" algn="tl">
+                    <a:srgbClr val="000000">
+                      <a:alpha val="43137"/>
+                    </a:srgbClr>
+                  </a:outerShdw>
+                </a:effectLst>
+              </a:rPr>
+              <a:t>Direct Query</a:t>
+            </a:r>
+            <a:endParaRPr lang="en-IN" altLang="en-US" sz="2000" b="1">
+              <a:solidFill>
+                <a:srgbClr val="C00000"/>
+              </a:solidFill>
+              <a:effectLst>
+                <a:outerShdw blurRad="38100" dist="38100" dir="2700000" algn="tl">
+                  <a:srgbClr val="000000">
+                    <a:alpha val="43137"/>
+                  </a:srgbClr>
+                </a:outerShdw>
+              </a:effectLst>
+            </a:endParaRPr>
+          </a:p>
+          <a:p>
+            <a:r>
+              <a:rPr lang="en-US" altLang="en-US" b="1"/>
+              <a:t>What is a direct query in Power BI?</a:t>
+            </a:r>
+            <a:endParaRPr lang="en-US" altLang="en-US" b="1"/>
+          </a:p>
+          <a:p>
+            <a:endParaRPr lang="en-US" altLang="en-US" b="1"/>
+          </a:p>
+          <a:p>
+            <a:r>
+              <a:rPr lang="en-US" altLang="en-US"/>
+              <a:t>DirectQuery is a direct connection to data source. Data will NOT be stored in Power BI model. Power BI will be a visualization layer, then query the data from data source every time. Power BI will only store metadata of tables (table names, column names, relationships…) but not the data.</a:t>
+            </a:r>
+            <a:endParaRPr lang="en-US" altLang="en-US"/>
+          </a:p>
+          <a:p>
+            <a:endParaRPr lang="en-US" altLang="en-US"/>
+          </a:p>
+          <a:p>
+            <a:endParaRPr lang="en-US" altLang="en-US"/>
+          </a:p>
+          <a:p>
+            <a:r>
+              <a:rPr lang="en-US" altLang="en-US"/>
+              <a:t>https://blog.coupler.io/power-bi-directquery/</a:t>
+            </a:r>
+            <a:endParaRPr lang="en-US" altLang="en-US"/>
+          </a:p>
+        </p:txBody>
+      </p:sp>
+    </p:spTree>
+  </p:cSld>
+  <p:clrMapOvr>
+    <a:masterClrMapping/>
+  </p:clrMapOvr>
+</p:sld>
+</file>
+
+<file path=ppt/slides/slide33.xml><?xml version="1.0" encoding="utf-8"?>
+<p:sld xmlns:a="http://schemas.openxmlformats.org/drawingml/2006/main" xmlns:r="http://schemas.openxmlformats.org/officeDocument/2006/relationships" xmlns:p="http://schemas.openxmlformats.org/presentationml/2006/main">
+  <p:cSld>
+    <p:spTree>
+      <p:nvGrpSpPr>
+        <p:cNvPr id="1" name=""/>
+        <p:cNvGrpSpPr/>
+        <p:nvPr/>
+      </p:nvGrpSpPr>
+      <p:grpSpPr/>
+      <p:sp>
+        <p:nvSpPr>
+          <p:cNvPr id="2" name="Text Box 1"/>
+          <p:cNvSpPr txBox="1"/>
+          <p:nvPr/>
+        </p:nvSpPr>
+        <p:spPr>
+          <a:xfrm>
+            <a:off x="379730" y="237490"/>
+            <a:ext cx="8940165" cy="5613400"/>
+          </a:xfrm>
+          <a:prstGeom prst="rect">
+            <a:avLst/>
+          </a:prstGeom>
+        </p:spPr>
+        <p:txBody>
+          <a:bodyPr wrap="square">
+            <a:spAutoFit/>
+          </a:bodyPr>
+          <a:p>
+            <a:pPr marL="0" indent="0">
+              <a:spcBef>
+                <a:spcPct val="0"/>
+              </a:spcBef>
+              <a:spcAft>
+                <a:spcPts val="1000"/>
+              </a:spcAft>
+            </a:pPr>
+            <a:r>
+              <a:rPr sz="1600" b="0" i="0">
+                <a:solidFill>
+                  <a:srgbClr val="001D35"/>
+                </a:solidFill>
+                <a:latin typeface="Google Sans"/>
+                <a:ea typeface="Google Sans"/>
+              </a:rPr>
+              <a:t>In Power BI's Power Query Editor, "Pivot" transforms rows into columns, while "Unpivot" does the opposite, turning columns into rows, allowing for data reorganization and analysis. </a:t>
+            </a:r>
+            <a:endParaRPr sz="1600" b="0" i="0">
+              <a:solidFill>
+                <a:srgbClr val="001D35"/>
+              </a:solidFill>
+              <a:latin typeface="Google Sans"/>
+              <a:ea typeface="Google Sans"/>
+            </a:endParaRPr>
+          </a:p>
+          <a:p>
+            <a:pPr marL="0" indent="0">
+              <a:spcBef>
+                <a:spcPts val="1000"/>
+              </a:spcBef>
+              <a:spcAft>
+                <a:spcPts val="500"/>
+              </a:spcAft>
+            </a:pPr>
+            <a:r>
+              <a:rPr sz="2000" b="1" i="0">
+                <a:solidFill>
+                  <a:srgbClr val="C00000"/>
+                </a:solidFill>
+                <a:effectLst>
+                  <a:outerShdw blurRad="38100" dist="38100" dir="2700000" algn="tl">
+                    <a:srgbClr val="000000">
+                      <a:alpha val="43137"/>
+                    </a:srgbClr>
+                  </a:outerShdw>
+                </a:effectLst>
+                <a:latin typeface="Google Sans"/>
+                <a:ea typeface="Google Sans"/>
+              </a:rPr>
+              <a:t>Pivot:</a:t>
+            </a:r>
+            <a:endParaRPr sz="2000" b="1" i="0">
+              <a:solidFill>
+                <a:srgbClr val="C00000"/>
+              </a:solidFill>
+              <a:effectLst>
+                <a:outerShdw blurRad="38100" dist="38100" dir="2700000" algn="tl">
+                  <a:srgbClr val="000000">
+                    <a:alpha val="43137"/>
+                  </a:srgbClr>
+                </a:outerShdw>
+              </a:effectLst>
+              <a:latin typeface="Google Sans"/>
+              <a:ea typeface="Google Sans"/>
+            </a:endParaRPr>
+          </a:p>
+          <a:p>
+            <a:pPr marL="0" indent="0">
+              <a:spcBef>
+                <a:spcPct val="0"/>
+              </a:spcBef>
+              <a:spcAft>
+                <a:spcPts val="400"/>
+              </a:spcAft>
+              <a:buFont typeface="Arial" panose="020B0604020202020204"/>
+              <a:buChar char="•"/>
+            </a:pPr>
+            <a:r>
+              <a:rPr sz="1600" b="1" i="0">
+                <a:solidFill>
+                  <a:srgbClr val="001D35"/>
+                </a:solidFill>
+                <a:latin typeface="Google Sans"/>
+                <a:ea typeface="Google Sans"/>
+              </a:rPr>
+              <a:t>Purpose:</a:t>
+            </a:r>
+            <a:endParaRPr sz="1600" b="1" i="0">
+              <a:solidFill>
+                <a:srgbClr val="001D35"/>
+              </a:solidFill>
+              <a:latin typeface="Google Sans"/>
+              <a:ea typeface="Google Sans"/>
+            </a:endParaRPr>
+          </a:p>
+          <a:p>
+            <a:pPr marL="0" indent="0">
+              <a:spcBef>
+                <a:spcPct val="0"/>
+              </a:spcBef>
+              <a:spcAft>
+                <a:spcPts val="400"/>
+              </a:spcAft>
+            </a:pPr>
+            <a:r>
+              <a:rPr sz="1600" b="0" i="0">
+                <a:solidFill>
+                  <a:srgbClr val="001D35"/>
+                </a:solidFill>
+                <a:latin typeface="Google Sans"/>
+                <a:ea typeface="Google Sans"/>
+              </a:rPr>
+              <a:t>Transforms data from a long format (many rows, few columns) to a wide format (few rows, many columns). </a:t>
+            </a:r>
+            <a:endParaRPr sz="1600" b="0" i="0">
+              <a:solidFill>
+                <a:srgbClr val="001D35"/>
+              </a:solidFill>
+              <a:latin typeface="Google Sans"/>
+              <a:ea typeface="Google Sans"/>
+            </a:endParaRPr>
+          </a:p>
+          <a:p>
+            <a:pPr marL="0" indent="0">
+              <a:spcBef>
+                <a:spcPct val="0"/>
+              </a:spcBef>
+              <a:spcAft>
+                <a:spcPts val="400"/>
+              </a:spcAft>
+            </a:pPr>
+            <a:endParaRPr sz="1600" b="0" i="0">
+              <a:solidFill>
+                <a:srgbClr val="001D35"/>
+              </a:solidFill>
+              <a:latin typeface="Google Sans"/>
+              <a:ea typeface="Google Sans"/>
+            </a:endParaRPr>
+          </a:p>
+          <a:p>
+            <a:pPr marL="0" indent="0">
+              <a:spcBef>
+                <a:spcPct val="0"/>
+              </a:spcBef>
+              <a:spcAft>
+                <a:spcPts val="400"/>
+              </a:spcAft>
+              <a:buFont typeface="Arial" panose="020B0604020202020204"/>
+              <a:buChar char="•"/>
+            </a:pPr>
+            <a:r>
+              <a:rPr sz="1600" b="1" i="0">
+                <a:solidFill>
+                  <a:srgbClr val="001D35"/>
+                </a:solidFill>
+                <a:latin typeface="Google Sans"/>
+                <a:ea typeface="Google Sans"/>
+              </a:rPr>
+              <a:t>How:</a:t>
+            </a:r>
+            <a:endParaRPr sz="1600" b="1" i="0">
+              <a:solidFill>
+                <a:srgbClr val="001D35"/>
+              </a:solidFill>
+              <a:latin typeface="Google Sans"/>
+              <a:ea typeface="Google Sans"/>
+            </a:endParaRPr>
+          </a:p>
+          <a:p>
+            <a:pPr marL="0" indent="0">
+              <a:spcBef>
+                <a:spcPct val="0"/>
+              </a:spcBef>
+              <a:spcAft>
+                <a:spcPts val="400"/>
+              </a:spcAft>
+            </a:pPr>
+            <a:r>
+              <a:rPr sz="1600" b="0" i="0">
+                <a:solidFill>
+                  <a:srgbClr val="001D35"/>
+                </a:solidFill>
+                <a:latin typeface="Google Sans"/>
+                <a:ea typeface="Google Sans"/>
+              </a:rPr>
+              <a:t>Select the columns you want to pivot, then choose "Transform" &gt; "Pivot Column". </a:t>
+            </a:r>
+            <a:endParaRPr sz="1600" b="0" i="0">
+              <a:solidFill>
+                <a:srgbClr val="001D35"/>
+              </a:solidFill>
+              <a:latin typeface="Google Sans"/>
+              <a:ea typeface="Google Sans"/>
+            </a:endParaRPr>
+          </a:p>
+          <a:p>
+            <a:pPr marL="0" indent="0">
+              <a:spcBef>
+                <a:spcPct val="0"/>
+              </a:spcBef>
+              <a:spcAft>
+                <a:spcPts val="400"/>
+              </a:spcAft>
+            </a:pPr>
+            <a:endParaRPr sz="1600" b="0" i="0">
+              <a:solidFill>
+                <a:srgbClr val="001D35"/>
+              </a:solidFill>
+              <a:latin typeface="Google Sans"/>
+              <a:ea typeface="Google Sans"/>
+            </a:endParaRPr>
+          </a:p>
+          <a:p>
+            <a:pPr marL="0" indent="0">
+              <a:spcBef>
+                <a:spcPct val="0"/>
+              </a:spcBef>
+              <a:spcAft>
+                <a:spcPts val="400"/>
+              </a:spcAft>
+              <a:buFont typeface="Arial" panose="020B0604020202020204"/>
+              <a:buChar char="•"/>
+            </a:pPr>
+            <a:r>
+              <a:rPr sz="1600" b="1" i="0">
+                <a:solidFill>
+                  <a:srgbClr val="001D35"/>
+                </a:solidFill>
+                <a:latin typeface="Google Sans"/>
+                <a:ea typeface="Google Sans"/>
+              </a:rPr>
+              <a:t>Example:</a:t>
+            </a:r>
+            <a:endParaRPr sz="1600" b="1" i="0">
+              <a:solidFill>
+                <a:srgbClr val="001D35"/>
+              </a:solidFill>
+              <a:latin typeface="Google Sans"/>
+              <a:ea typeface="Google Sans"/>
+            </a:endParaRPr>
+          </a:p>
+          <a:p>
+            <a:pPr marL="0" indent="0">
+              <a:spcBef>
+                <a:spcPct val="0"/>
+              </a:spcBef>
+              <a:spcAft>
+                <a:spcPts val="400"/>
+              </a:spcAft>
+            </a:pPr>
+            <a:r>
+              <a:rPr sz="1600" b="0" i="0">
+                <a:solidFill>
+                  <a:srgbClr val="001D35"/>
+                </a:solidFill>
+                <a:latin typeface="Google Sans"/>
+                <a:ea typeface="Google Sans"/>
+              </a:rPr>
+              <a:t>If you have a table with "Region" and "Sales Amount" in separate columns, pivoting on "Region" will create separate columns for each region, with the "Sales Amount" values in those columns. </a:t>
+            </a:r>
+            <a:endParaRPr sz="1600" b="0" i="0">
+              <a:solidFill>
+                <a:srgbClr val="001D35"/>
+              </a:solidFill>
+              <a:latin typeface="Google Sans"/>
+              <a:ea typeface="Google Sans"/>
+            </a:endParaRPr>
+          </a:p>
+          <a:p>
+            <a:pPr marL="0" indent="0">
+              <a:spcBef>
+                <a:spcPct val="0"/>
+              </a:spcBef>
+              <a:spcAft>
+                <a:spcPts val="400"/>
+              </a:spcAft>
+            </a:pPr>
+            <a:endParaRPr sz="1600" b="0" i="0">
+              <a:solidFill>
+                <a:srgbClr val="001D35"/>
+              </a:solidFill>
+              <a:latin typeface="Google Sans"/>
+              <a:ea typeface="Google Sans"/>
+            </a:endParaRPr>
+          </a:p>
+          <a:p>
+            <a:pPr marL="0" indent="0">
+              <a:spcBef>
+                <a:spcPct val="0"/>
+              </a:spcBef>
+              <a:spcAft>
+                <a:spcPct val="0"/>
+              </a:spcAft>
+              <a:buFont typeface="Arial" panose="020B0604020202020204"/>
+              <a:buChar char="•"/>
+            </a:pPr>
+            <a:r>
+              <a:rPr sz="1600" b="1" i="0">
+                <a:solidFill>
+                  <a:srgbClr val="001D35"/>
+                </a:solidFill>
+                <a:latin typeface="Google Sans"/>
+                <a:ea typeface="Google Sans"/>
+              </a:rPr>
+              <a:t>Aggregation:</a:t>
+            </a:r>
+            <a:endParaRPr sz="1600" b="1" i="0">
+              <a:solidFill>
+                <a:srgbClr val="001D35"/>
+              </a:solidFill>
+              <a:latin typeface="Google Sans"/>
+              <a:ea typeface="Google Sans"/>
+            </a:endParaRPr>
+          </a:p>
+          <a:p>
+            <a:pPr marL="0" indent="0">
+              <a:spcBef>
+                <a:spcPct val="0"/>
+              </a:spcBef>
+              <a:spcAft>
+                <a:spcPct val="0"/>
+              </a:spcAft>
+            </a:pPr>
+            <a:r>
+              <a:rPr sz="1600" b="0" i="0">
+                <a:solidFill>
+                  <a:srgbClr val="001D35"/>
+                </a:solidFill>
+                <a:latin typeface="Google Sans"/>
+                <a:ea typeface="Google Sans"/>
+              </a:rPr>
+              <a:t>Pivot also aggregates the values in the remaining columns (e.g., if you have multiple "Sales Amount" values for the same region, it will sum or average them). </a:t>
+            </a:r>
+            <a:endParaRPr sz="1600" b="0" i="0">
+              <a:solidFill>
+                <a:srgbClr val="001D35"/>
+              </a:solidFill>
+              <a:latin typeface="Google Sans"/>
+              <a:ea typeface="Google Sans"/>
+            </a:endParaRPr>
+          </a:p>
+        </p:txBody>
+      </p:sp>
+    </p:spTree>
+  </p:cSld>
+  <p:clrMapOvr>
+    <a:masterClrMapping/>
+  </p:clrMapOvr>
+</p:sld>
+</file>
+
+<file path=ppt/slides/slide34.xml><?xml version="1.0" encoding="utf-8"?>
+<p:sld xmlns:a="http://schemas.openxmlformats.org/drawingml/2006/main" xmlns:r="http://schemas.openxmlformats.org/officeDocument/2006/relationships" xmlns:p="http://schemas.openxmlformats.org/presentationml/2006/main">
+  <p:cSld>
+    <p:spTree>
+      <p:nvGrpSpPr>
+        <p:cNvPr id="1" name=""/>
+        <p:cNvGrpSpPr/>
+        <p:nvPr/>
+      </p:nvGrpSpPr>
+      <p:grpSpPr/>
+      <p:sp>
+        <p:nvSpPr>
+          <p:cNvPr id="2" name="Text Box 1"/>
+          <p:cNvSpPr txBox="1"/>
+          <p:nvPr/>
+        </p:nvSpPr>
+        <p:spPr>
+          <a:xfrm>
+            <a:off x="345440" y="207010"/>
+            <a:ext cx="7807960" cy="5487670"/>
+          </a:xfrm>
+          <a:prstGeom prst="rect">
+            <a:avLst/>
+          </a:prstGeom>
+        </p:spPr>
+        <p:txBody>
+          <a:bodyPr wrap="square">
+            <a:spAutoFit/>
+          </a:bodyPr>
+          <a:p>
+            <a:pPr marL="0" indent="0">
+              <a:spcBef>
+                <a:spcPts val="1000"/>
+              </a:spcBef>
+              <a:spcAft>
+                <a:spcPts val="500"/>
+              </a:spcAft>
+            </a:pPr>
+            <a:r>
+              <a:rPr sz="2400" b="1" i="0">
+                <a:solidFill>
+                  <a:srgbClr val="C00000"/>
+                </a:solidFill>
+                <a:effectLst>
+                  <a:outerShdw blurRad="38100" dist="38100" dir="2700000" algn="tl">
+                    <a:srgbClr val="000000">
+                      <a:alpha val="43137"/>
+                    </a:srgbClr>
+                  </a:outerShdw>
+                </a:effectLst>
+                <a:latin typeface="Arial" panose="020B0604020202020204" pitchFamily="34" charset="0"/>
+                <a:ea typeface="Google Sans"/>
+                <a:cs typeface="Arial" panose="020B0604020202020204" pitchFamily="34" charset="0"/>
+              </a:rPr>
+              <a:t>Unpivot:</a:t>
+            </a:r>
+            <a:endParaRPr sz="2400" b="1" i="0">
+              <a:solidFill>
+                <a:srgbClr val="C00000"/>
+              </a:solidFill>
+              <a:effectLst>
+                <a:outerShdw blurRad="38100" dist="38100" dir="2700000" algn="tl">
+                  <a:srgbClr val="000000">
+                    <a:alpha val="43137"/>
+                  </a:srgbClr>
+                </a:outerShdw>
+              </a:effectLst>
+              <a:latin typeface="Arial" panose="020B0604020202020204" pitchFamily="34" charset="0"/>
+              <a:ea typeface="Google Sans"/>
+              <a:cs typeface="Arial" panose="020B0604020202020204" pitchFamily="34" charset="0"/>
+            </a:endParaRPr>
+          </a:p>
+          <a:p>
+            <a:pPr marL="0" indent="0">
+              <a:spcBef>
+                <a:spcPts val="1000"/>
+              </a:spcBef>
+              <a:spcAft>
+                <a:spcPts val="500"/>
+              </a:spcAft>
+            </a:pPr>
+            <a:endParaRPr sz="2400" i="0">
+              <a:solidFill>
+                <a:srgbClr val="C00000"/>
+              </a:solidFill>
+              <a:effectLst>
+                <a:outerShdw blurRad="38100" dist="38100" dir="2700000" algn="tl">
+                  <a:srgbClr val="000000">
+                    <a:alpha val="43137"/>
+                  </a:srgbClr>
+                </a:outerShdw>
+              </a:effectLst>
+              <a:latin typeface="Google Sans"/>
+              <a:ea typeface="Google Sans"/>
+            </a:endParaRPr>
+          </a:p>
+          <a:p>
+            <a:pPr marL="0" indent="0">
+              <a:spcBef>
+                <a:spcPct val="0"/>
+              </a:spcBef>
+              <a:spcAft>
+                <a:spcPts val="400"/>
+              </a:spcAft>
+              <a:buFont typeface="Arial" panose="020B0604020202020204"/>
+              <a:buChar char="•"/>
+            </a:pPr>
+            <a:r>
+              <a:rPr sz="1600" b="1" i="0">
+                <a:solidFill>
+                  <a:srgbClr val="001D35"/>
+                </a:solidFill>
+                <a:latin typeface="Google Sans"/>
+                <a:ea typeface="Google Sans"/>
+              </a:rPr>
+              <a:t>Purpose:</a:t>
+            </a:r>
+            <a:endParaRPr sz="1600" b="1" i="0">
+              <a:solidFill>
+                <a:srgbClr val="001D35"/>
+              </a:solidFill>
+              <a:latin typeface="Google Sans"/>
+              <a:ea typeface="Google Sans"/>
+            </a:endParaRPr>
+          </a:p>
+          <a:p>
+            <a:pPr marL="0" indent="0">
+              <a:spcBef>
+                <a:spcPct val="0"/>
+              </a:spcBef>
+              <a:spcAft>
+                <a:spcPts val="400"/>
+              </a:spcAft>
+            </a:pPr>
+            <a:r>
+              <a:rPr sz="1600" b="0" i="0">
+                <a:solidFill>
+                  <a:srgbClr val="001D35"/>
+                </a:solidFill>
+                <a:latin typeface="Google Sans"/>
+                <a:ea typeface="Google Sans"/>
+              </a:rPr>
+              <a:t>Transforms data from a wide format to a long format. </a:t>
+            </a:r>
+            <a:endParaRPr sz="1600" b="0" i="0">
+              <a:solidFill>
+                <a:srgbClr val="001D35"/>
+              </a:solidFill>
+              <a:latin typeface="Google Sans"/>
+              <a:ea typeface="Google Sans"/>
+            </a:endParaRPr>
+          </a:p>
+          <a:p>
+            <a:pPr marL="0" indent="0">
+              <a:spcBef>
+                <a:spcPct val="0"/>
+              </a:spcBef>
+              <a:spcAft>
+                <a:spcPts val="400"/>
+              </a:spcAft>
+            </a:pPr>
+            <a:endParaRPr sz="1600" b="0" i="0">
+              <a:solidFill>
+                <a:srgbClr val="001D35"/>
+              </a:solidFill>
+              <a:latin typeface="Google Sans"/>
+              <a:ea typeface="Google Sans"/>
+            </a:endParaRPr>
+          </a:p>
+          <a:p>
+            <a:pPr marL="0" indent="0">
+              <a:spcBef>
+                <a:spcPct val="0"/>
+              </a:spcBef>
+              <a:spcAft>
+                <a:spcPts val="400"/>
+              </a:spcAft>
+              <a:buFont typeface="Arial" panose="020B0604020202020204"/>
+              <a:buChar char="•"/>
+            </a:pPr>
+            <a:r>
+              <a:rPr sz="1600" b="1" i="0">
+                <a:solidFill>
+                  <a:srgbClr val="001D35"/>
+                </a:solidFill>
+                <a:latin typeface="Google Sans"/>
+                <a:ea typeface="Google Sans"/>
+              </a:rPr>
+              <a:t>How:</a:t>
+            </a:r>
+            <a:endParaRPr sz="1600" b="1" i="0">
+              <a:solidFill>
+                <a:srgbClr val="001D35"/>
+              </a:solidFill>
+              <a:latin typeface="Google Sans"/>
+              <a:ea typeface="Google Sans"/>
+            </a:endParaRPr>
+          </a:p>
+          <a:p>
+            <a:pPr marL="0" indent="0">
+              <a:spcBef>
+                <a:spcPct val="0"/>
+              </a:spcBef>
+              <a:spcAft>
+                <a:spcPts val="400"/>
+              </a:spcAft>
+            </a:pPr>
+            <a:r>
+              <a:rPr sz="1600" b="0" i="0">
+                <a:solidFill>
+                  <a:srgbClr val="001D35"/>
+                </a:solidFill>
+                <a:latin typeface="Google Sans"/>
+                <a:ea typeface="Google Sans"/>
+              </a:rPr>
+              <a:t>Select the columns you want to unpivot, then choose "Transform" &gt; "Unpivot Columns". </a:t>
+            </a:r>
+            <a:endParaRPr sz="1600" b="0" i="0">
+              <a:solidFill>
+                <a:srgbClr val="001D35"/>
+              </a:solidFill>
+              <a:latin typeface="Google Sans"/>
+              <a:ea typeface="Google Sans"/>
+            </a:endParaRPr>
+          </a:p>
+          <a:p>
+            <a:pPr marL="0" indent="0">
+              <a:spcBef>
+                <a:spcPct val="0"/>
+              </a:spcBef>
+              <a:spcAft>
+                <a:spcPts val="400"/>
+              </a:spcAft>
+            </a:pPr>
+            <a:endParaRPr sz="1600" b="0" i="0">
+              <a:solidFill>
+                <a:srgbClr val="001D35"/>
+              </a:solidFill>
+              <a:latin typeface="Google Sans"/>
+              <a:ea typeface="Google Sans"/>
+            </a:endParaRPr>
+          </a:p>
+          <a:p>
+            <a:pPr marL="0" indent="0">
+              <a:spcBef>
+                <a:spcPct val="0"/>
+              </a:spcBef>
+              <a:spcAft>
+                <a:spcPts val="400"/>
+              </a:spcAft>
+              <a:buFont typeface="Arial" panose="020B0604020202020204"/>
+              <a:buChar char="•"/>
+            </a:pPr>
+            <a:r>
+              <a:rPr sz="1600" b="1" i="0">
+                <a:solidFill>
+                  <a:srgbClr val="001D35"/>
+                </a:solidFill>
+                <a:latin typeface="Google Sans"/>
+                <a:ea typeface="Google Sans"/>
+              </a:rPr>
+              <a:t>Example:</a:t>
+            </a:r>
+            <a:endParaRPr sz="1600" b="1" i="0">
+              <a:solidFill>
+                <a:srgbClr val="001D35"/>
+              </a:solidFill>
+              <a:latin typeface="Google Sans"/>
+              <a:ea typeface="Google Sans"/>
+            </a:endParaRPr>
+          </a:p>
+          <a:p>
+            <a:pPr marL="0" indent="0">
+              <a:spcBef>
+                <a:spcPct val="0"/>
+              </a:spcBef>
+              <a:spcAft>
+                <a:spcPts val="400"/>
+              </a:spcAft>
+            </a:pPr>
+            <a:r>
+              <a:rPr sz="1600" b="0" i="0">
+                <a:solidFill>
+                  <a:srgbClr val="001D35"/>
+                </a:solidFill>
+                <a:latin typeface="Google Sans"/>
+                <a:ea typeface="Google Sans"/>
+              </a:rPr>
+              <a:t>If you have a table with "North", "South", and "East" as columns, unpivoting them will create a single "Region" column with "North", "South", and "East" as values, and a "Sales Amount" column with the corresponding values. </a:t>
+            </a:r>
+            <a:endParaRPr sz="1600" b="0" i="0">
+              <a:solidFill>
+                <a:srgbClr val="001D35"/>
+              </a:solidFill>
+              <a:latin typeface="Google Sans"/>
+              <a:ea typeface="Google Sans"/>
+            </a:endParaRPr>
+          </a:p>
+          <a:p>
+            <a:pPr marL="0" indent="0">
+              <a:spcBef>
+                <a:spcPct val="0"/>
+              </a:spcBef>
+              <a:spcAft>
+                <a:spcPts val="400"/>
+              </a:spcAft>
+            </a:pPr>
+            <a:endParaRPr sz="1600" b="0" i="0">
+              <a:solidFill>
+                <a:srgbClr val="001D35"/>
+              </a:solidFill>
+              <a:latin typeface="Google Sans"/>
+              <a:ea typeface="Google Sans"/>
+            </a:endParaRPr>
+          </a:p>
+          <a:p>
+            <a:pPr marL="0" indent="0">
+              <a:spcBef>
+                <a:spcPct val="0"/>
+              </a:spcBef>
+              <a:spcAft>
+                <a:spcPct val="0"/>
+              </a:spcAft>
+              <a:buFont typeface="Arial" panose="020B0604020202020204"/>
+              <a:buChar char="•"/>
+            </a:pPr>
+            <a:r>
+              <a:rPr sz="1600" b="1" i="0">
+                <a:solidFill>
+                  <a:srgbClr val="001D35"/>
+                </a:solidFill>
+                <a:latin typeface="Google Sans"/>
+                <a:ea typeface="Google Sans"/>
+              </a:rPr>
+              <a:t>Outcome:</a:t>
+            </a:r>
+            <a:endParaRPr sz="1600" b="1" i="0">
+              <a:solidFill>
+                <a:srgbClr val="001D35"/>
+              </a:solidFill>
+              <a:latin typeface="Google Sans"/>
+              <a:ea typeface="Google Sans"/>
+            </a:endParaRPr>
+          </a:p>
+          <a:p>
+            <a:pPr marL="0" indent="0">
+              <a:spcBef>
+                <a:spcPct val="0"/>
+              </a:spcBef>
+              <a:spcAft>
+                <a:spcPct val="0"/>
+              </a:spcAft>
+            </a:pPr>
+            <a:r>
+              <a:rPr sz="1600" b="0" i="0">
+                <a:solidFill>
+                  <a:srgbClr val="001D35"/>
+                </a:solidFill>
+                <a:latin typeface="Google Sans"/>
+                <a:ea typeface="Google Sans"/>
+              </a:rPr>
+              <a:t>Unpivot converts column names into a single "Attribute" column and the values into a "Value" column. </a:t>
+            </a:r>
+            <a:endParaRPr sz="1600" b="0" i="0">
+              <a:solidFill>
+                <a:srgbClr val="001D35"/>
+              </a:solidFill>
+              <a:latin typeface="Google Sans"/>
+              <a:ea typeface="Google Sans"/>
+            </a:endParaRPr>
+          </a:p>
+        </p:txBody>
+      </p:sp>
+      <p:sp>
+        <p:nvSpPr>
+          <p:cNvPr id="3" name="Text Box 2"/>
+          <p:cNvSpPr txBox="1"/>
+          <p:nvPr/>
+        </p:nvSpPr>
+        <p:spPr>
+          <a:xfrm>
+            <a:off x="825500" y="5995035"/>
+            <a:ext cx="6096000" cy="368300"/>
+          </a:xfrm>
+          <a:prstGeom prst="rect">
+            <a:avLst/>
+          </a:prstGeom>
+          <a:noFill/>
+        </p:spPr>
+        <p:txBody>
+          <a:bodyPr wrap="square" rtlCol="0" anchor="t">
+            <a:spAutoFit/>
+          </a:bodyPr>
+          <a:p>
+            <a:r>
+              <a:rPr lang="en-US" altLang="en-US"/>
+              <a:t>https://www.youtube.com/watch?v=pXrAXtLhDWU&amp;t=273</a:t>
+            </a:r>
+            <a:endParaRPr lang="en-US"/>
+          </a:p>
+        </p:txBody>
+      </p:sp>
+    </p:spTree>
+  </p:cSld>
+  <p:clrMapOvr>
+    <a:masterClrMapping/>
+  </p:clrMapOvr>
+</p:sld>
+</file>
+
+<file path=ppt/slides/slide35.xml><?xml version="1.0" encoding="utf-8"?>
+<p:sld xmlns:a="http://schemas.openxmlformats.org/drawingml/2006/main" xmlns:r="http://schemas.openxmlformats.org/officeDocument/2006/relationships" xmlns:p="http://schemas.openxmlformats.org/presentationml/2006/main">
+  <p:cSld>
+    <p:spTree>
+      <p:nvGrpSpPr>
+        <p:cNvPr id="1" name=""/>
+        <p:cNvGrpSpPr/>
+        <p:nvPr/>
+      </p:nvGrpSpPr>
+      <p:grpSpPr/>
+      <p:sp>
+        <p:nvSpPr>
+          <p:cNvPr id="2" name="Text Box 1"/>
+          <p:cNvSpPr txBox="1"/>
+          <p:nvPr/>
+        </p:nvSpPr>
+        <p:spPr>
+          <a:xfrm>
+            <a:off x="178435" y="271145"/>
+            <a:ext cx="11775440" cy="4874895"/>
+          </a:xfrm>
+          <a:prstGeom prst="rect">
+            <a:avLst/>
+          </a:prstGeom>
+        </p:spPr>
+        <p:txBody>
+          <a:bodyPr wrap="square">
+            <a:spAutoFit/>
+          </a:bodyPr>
+          <a:p>
+            <a:pPr marL="0" indent="0">
+              <a:spcBef>
+                <a:spcPct val="0"/>
+              </a:spcBef>
+              <a:spcAft>
+                <a:spcPts val="1000"/>
+              </a:spcAft>
+            </a:pPr>
+            <a:r>
+              <a:rPr lang="en-US" altLang="en-US" sz="1600" b="0" i="0">
+                <a:solidFill>
+                  <a:srgbClr val="001D35"/>
+                </a:solidFill>
+                <a:latin typeface="Arial" panose="020B0604020202020204" pitchFamily="34" charset="0"/>
+                <a:ea typeface="Google Sans"/>
+                <a:cs typeface="Arial" panose="020B0604020202020204" pitchFamily="34" charset="0"/>
+              </a:rPr>
+              <a:t>Drill Through in Power BI is a powerful feature that helps you dive deeper into your data without leaving your main report.</a:t>
+            </a:r>
+            <a:endParaRPr lang="en-US" altLang="en-US" sz="1600" b="0" i="0">
+              <a:solidFill>
+                <a:srgbClr val="001D35"/>
+              </a:solidFill>
+              <a:latin typeface="Arial" panose="020B0604020202020204" pitchFamily="34" charset="0"/>
+              <a:ea typeface="Google Sans"/>
+              <a:cs typeface="Arial" panose="020B0604020202020204" pitchFamily="34" charset="0"/>
+            </a:endParaRPr>
+          </a:p>
+          <a:p>
+            <a:pPr marL="0" indent="0">
+              <a:spcBef>
+                <a:spcPct val="0"/>
+              </a:spcBef>
+              <a:spcAft>
+                <a:spcPts val="1000"/>
+              </a:spcAft>
+            </a:pPr>
+            <a:endParaRPr sz="1600" b="0" i="0">
+              <a:solidFill>
+                <a:srgbClr val="001D35"/>
+              </a:solidFill>
+              <a:latin typeface="Arial" panose="020B0604020202020204" pitchFamily="34" charset="0"/>
+              <a:ea typeface="Google Sans"/>
+              <a:cs typeface="Arial" panose="020B0604020202020204" pitchFamily="34" charset="0"/>
+            </a:endParaRPr>
+          </a:p>
+          <a:p>
+            <a:pPr marL="0" indent="0">
+              <a:spcBef>
+                <a:spcPct val="0"/>
+              </a:spcBef>
+              <a:spcAft>
+                <a:spcPts val="1000"/>
+              </a:spcAft>
+            </a:pPr>
+            <a:r>
+              <a:rPr sz="1600" b="0" i="0">
+                <a:solidFill>
+                  <a:srgbClr val="001D35"/>
+                </a:solidFill>
+                <a:latin typeface="Arial" panose="020B0604020202020204" pitchFamily="34" charset="0"/>
+                <a:ea typeface="Google Sans"/>
+                <a:cs typeface="Arial" panose="020B0604020202020204" pitchFamily="34" charset="0"/>
+              </a:rPr>
+              <a:t>In Power BI, "drillthrough" allows users to navigate from a summary report page to a more detailed page, focusing on a specific data point, by right-clicking and selecting the drillthrough option. </a:t>
+            </a:r>
+            <a:endParaRPr sz="1600" b="0" i="0">
+              <a:solidFill>
+                <a:srgbClr val="001D35"/>
+              </a:solidFill>
+              <a:latin typeface="Arial" panose="020B0604020202020204" pitchFamily="34" charset="0"/>
+              <a:ea typeface="Google Sans"/>
+              <a:cs typeface="Arial" panose="020B0604020202020204" pitchFamily="34" charset="0"/>
+            </a:endParaRPr>
+          </a:p>
+          <a:p>
+            <a:pPr marL="0" indent="0">
+              <a:spcBef>
+                <a:spcPts val="1000"/>
+              </a:spcBef>
+              <a:spcAft>
+                <a:spcPts val="500"/>
+              </a:spcAft>
+            </a:pPr>
+            <a:r>
+              <a:rPr sz="1600" b="0" i="0">
+                <a:solidFill>
+                  <a:srgbClr val="001D35"/>
+                </a:solidFill>
+                <a:latin typeface="Arial" panose="020B0604020202020204" pitchFamily="34" charset="0"/>
+                <a:ea typeface="Google Sans"/>
+                <a:cs typeface="Arial" panose="020B0604020202020204" pitchFamily="34" charset="0"/>
+              </a:rPr>
+              <a:t>Here's a breakdown of how drillthrough works:</a:t>
+            </a:r>
+            <a:endParaRPr sz="1600" b="0" i="0">
+              <a:solidFill>
+                <a:srgbClr val="001D35"/>
+              </a:solidFill>
+              <a:latin typeface="Arial" panose="020B0604020202020204" pitchFamily="34" charset="0"/>
+              <a:ea typeface="Google Sans"/>
+              <a:cs typeface="Arial" panose="020B0604020202020204" pitchFamily="34" charset="0"/>
+            </a:endParaRPr>
+          </a:p>
+          <a:p>
+            <a:pPr marL="0" indent="0">
+              <a:spcBef>
+                <a:spcPct val="0"/>
+              </a:spcBef>
+              <a:spcAft>
+                <a:spcPts val="400"/>
+              </a:spcAft>
+              <a:buFont typeface="Arial" panose="020B0604020202020204"/>
+              <a:buChar char="•"/>
+            </a:pPr>
+            <a:r>
+              <a:rPr sz="1600" b="0" i="0">
+                <a:solidFill>
+                  <a:srgbClr val="001D35"/>
+                </a:solidFill>
+                <a:latin typeface="Arial" panose="020B0604020202020204" pitchFamily="34" charset="0"/>
+                <a:ea typeface="Google Sans"/>
+                <a:cs typeface="Arial" panose="020B0604020202020204" pitchFamily="34" charset="0"/>
+              </a:rPr>
+              <a:t>Purpose:</a:t>
+            </a:r>
+            <a:endParaRPr sz="1600" b="0" i="0">
+              <a:solidFill>
+                <a:srgbClr val="001D35"/>
+              </a:solidFill>
+              <a:latin typeface="Arial" panose="020B0604020202020204" pitchFamily="34" charset="0"/>
+              <a:ea typeface="Google Sans"/>
+              <a:cs typeface="Arial" panose="020B0604020202020204" pitchFamily="34" charset="0"/>
+            </a:endParaRPr>
+          </a:p>
+          <a:p>
+            <a:pPr marL="0" indent="0">
+              <a:spcBef>
+                <a:spcPct val="0"/>
+              </a:spcBef>
+              <a:spcAft>
+                <a:spcPts val="400"/>
+              </a:spcAft>
+            </a:pPr>
+            <a:r>
+              <a:rPr sz="1600" b="0" i="0">
+                <a:solidFill>
+                  <a:srgbClr val="001D35"/>
+                </a:solidFill>
+                <a:latin typeface="Arial" panose="020B0604020202020204" pitchFamily="34" charset="0"/>
+                <a:ea typeface="Google Sans"/>
+                <a:cs typeface="Arial" panose="020B0604020202020204" pitchFamily="34" charset="0"/>
+              </a:rPr>
+              <a:t>Drillthrough enables users to explore data in more detail by moving from a summary view to a page with specific context. </a:t>
+            </a:r>
+            <a:endParaRPr sz="1600" b="0" i="0">
+              <a:solidFill>
+                <a:srgbClr val="001D35"/>
+              </a:solidFill>
+              <a:latin typeface="Arial" panose="020B0604020202020204" pitchFamily="34" charset="0"/>
+              <a:ea typeface="Google Sans"/>
+              <a:cs typeface="Arial" panose="020B0604020202020204" pitchFamily="34" charset="0"/>
+            </a:endParaRPr>
+          </a:p>
+          <a:p>
+            <a:pPr marL="0" indent="0">
+              <a:spcBef>
+                <a:spcPct val="0"/>
+              </a:spcBef>
+              <a:spcAft>
+                <a:spcPts val="400"/>
+              </a:spcAft>
+              <a:buFont typeface="Arial" panose="020B0604020202020204"/>
+              <a:buChar char="•"/>
+            </a:pPr>
+            <a:r>
+              <a:rPr sz="1600" b="0" i="0">
+                <a:solidFill>
+                  <a:srgbClr val="001D35"/>
+                </a:solidFill>
+                <a:latin typeface="Arial" panose="020B0604020202020204" pitchFamily="34" charset="0"/>
+                <a:ea typeface="Google Sans"/>
+                <a:cs typeface="Arial" panose="020B0604020202020204" pitchFamily="34" charset="0"/>
+              </a:rPr>
+              <a:t>How it works:</a:t>
+            </a:r>
+            <a:endParaRPr sz="1600" b="0" i="0">
+              <a:solidFill>
+                <a:srgbClr val="001D35"/>
+              </a:solidFill>
+              <a:latin typeface="Arial" panose="020B0604020202020204" pitchFamily="34" charset="0"/>
+              <a:ea typeface="Google Sans"/>
+              <a:cs typeface="Arial" panose="020B0604020202020204" pitchFamily="34" charset="0"/>
+            </a:endParaRPr>
+          </a:p>
+          <a:p>
+            <a:pPr marL="0" lvl="1" indent="0">
+              <a:spcBef>
+                <a:spcPts val="400"/>
+              </a:spcBef>
+              <a:spcAft>
+                <a:spcPts val="400"/>
+              </a:spcAft>
+              <a:buFont typeface="Arial" panose="020B0604020202020204"/>
+              <a:buChar char="◦"/>
+            </a:pPr>
+            <a:r>
+              <a:rPr sz="1600" b="0" i="0">
+                <a:solidFill>
+                  <a:srgbClr val="001D35"/>
+                </a:solidFill>
+                <a:latin typeface="Arial" panose="020B0604020202020204" pitchFamily="34" charset="0"/>
+                <a:ea typeface="Google Sans"/>
+                <a:cs typeface="Arial" panose="020B0604020202020204" pitchFamily="34" charset="0"/>
+              </a:rPr>
+              <a:t>Source Visual: You start on a report page with a visual containing summary data. </a:t>
+            </a:r>
+            <a:endParaRPr sz="1600" b="0" i="0">
+              <a:solidFill>
+                <a:srgbClr val="001D35"/>
+              </a:solidFill>
+              <a:latin typeface="Arial" panose="020B0604020202020204" pitchFamily="34" charset="0"/>
+              <a:ea typeface="Google Sans"/>
+              <a:cs typeface="Arial" panose="020B0604020202020204" pitchFamily="34" charset="0"/>
+            </a:endParaRPr>
+          </a:p>
+          <a:p>
+            <a:pPr marL="0" lvl="1" indent="0">
+              <a:spcBef>
+                <a:spcPts val="400"/>
+              </a:spcBef>
+              <a:spcAft>
+                <a:spcPts val="400"/>
+              </a:spcAft>
+              <a:buFont typeface="Arial" panose="020B0604020202020204"/>
+              <a:buChar char="◦"/>
+            </a:pPr>
+            <a:r>
+              <a:rPr sz="1600" b="0" i="0">
+                <a:solidFill>
+                  <a:srgbClr val="001D35"/>
+                </a:solidFill>
+                <a:latin typeface="Arial" panose="020B0604020202020204" pitchFamily="34" charset="0"/>
+                <a:ea typeface="Google Sans"/>
+                <a:cs typeface="Arial" panose="020B0604020202020204" pitchFamily="34" charset="0"/>
+              </a:rPr>
+              <a:t>Drillthrough Target: You create a destination page (or "drillthrough page") that focuses on a specific entity or data point. </a:t>
+            </a:r>
+            <a:endParaRPr sz="1600" b="0" i="0">
+              <a:solidFill>
+                <a:srgbClr val="001D35"/>
+              </a:solidFill>
+              <a:latin typeface="Arial" panose="020B0604020202020204" pitchFamily="34" charset="0"/>
+              <a:ea typeface="Google Sans"/>
+              <a:cs typeface="Arial" panose="020B0604020202020204" pitchFamily="34" charset="0"/>
+            </a:endParaRPr>
+          </a:p>
+          <a:p>
+            <a:pPr marL="0" lvl="1" indent="0">
+              <a:spcBef>
+                <a:spcPts val="400"/>
+              </a:spcBef>
+              <a:spcAft>
+                <a:spcPts val="400"/>
+              </a:spcAft>
+              <a:buFont typeface="Arial" panose="020B0604020202020204"/>
+              <a:buChar char="◦"/>
+            </a:pPr>
+            <a:r>
+              <a:rPr sz="1600" b="0" i="0">
+                <a:solidFill>
+                  <a:srgbClr val="001D35"/>
+                </a:solidFill>
+                <a:latin typeface="Arial" panose="020B0604020202020204" pitchFamily="34" charset="0"/>
+                <a:ea typeface="Google Sans"/>
+                <a:cs typeface="Arial" panose="020B0604020202020204" pitchFamily="34" charset="0"/>
+              </a:rPr>
+              <a:t>Initiating Drillthrough: When a user right-clicks a data point in the source visual, they can select the "Drillthrough" option to navigate to the target page. </a:t>
+            </a:r>
+            <a:endParaRPr sz="1600" b="0" i="0">
+              <a:solidFill>
+                <a:srgbClr val="001D35"/>
+              </a:solidFill>
+              <a:latin typeface="Arial" panose="020B0604020202020204" pitchFamily="34" charset="0"/>
+              <a:ea typeface="Google Sans"/>
+              <a:cs typeface="Arial" panose="020B0604020202020204" pitchFamily="34" charset="0"/>
+            </a:endParaRPr>
+          </a:p>
+          <a:p>
+            <a:pPr marL="0" lvl="1" indent="0">
+              <a:spcBef>
+                <a:spcPts val="400"/>
+              </a:spcBef>
+              <a:spcAft>
+                <a:spcPct val="0"/>
+              </a:spcAft>
+              <a:buFont typeface="Arial" panose="020B0604020202020204"/>
+              <a:buChar char="◦"/>
+            </a:pPr>
+            <a:r>
+              <a:rPr sz="1600" b="0" i="0">
+                <a:solidFill>
+                  <a:srgbClr val="001D35"/>
+                </a:solidFill>
+                <a:latin typeface="Arial" panose="020B0604020202020204" pitchFamily="34" charset="0"/>
+                <a:ea typeface="Google Sans"/>
+                <a:cs typeface="Arial" panose="020B0604020202020204" pitchFamily="34" charset="0"/>
+              </a:rPr>
+              <a:t>Contextual Filtering: The target page will be filtered to show only the data related to the selected data point, providing a detailed view. </a:t>
+            </a:r>
+            <a:endParaRPr sz="1600" b="0" i="0">
+              <a:solidFill>
+                <a:srgbClr val="001D35"/>
+              </a:solidFill>
+              <a:latin typeface="Arial" panose="020B0604020202020204" pitchFamily="34" charset="0"/>
+              <a:ea typeface="Google Sans"/>
+              <a:cs typeface="Arial" panose="020B0604020202020204" pitchFamily="34" charset="0"/>
+            </a:endParaRPr>
+          </a:p>
+          <a:p>
+            <a:pPr marL="0" indent="0">
+              <a:spcBef>
+                <a:spcPct val="0"/>
+              </a:spcBef>
+              <a:spcAft>
+                <a:spcPts val="400"/>
+              </a:spcAft>
+              <a:buFont typeface="Arial" panose="020B0604020202020204"/>
+              <a:buNone/>
+            </a:pPr>
+            <a:endParaRPr sz="1600" b="0" i="0">
+              <a:solidFill>
+                <a:srgbClr val="001D35"/>
+              </a:solidFill>
+              <a:latin typeface="Arial" panose="020B0604020202020204" pitchFamily="34" charset="0"/>
+              <a:ea typeface="Google Sans"/>
+              <a:cs typeface="Arial" panose="020B0604020202020204" pitchFamily="34" charset="0"/>
+            </a:endParaRPr>
+          </a:p>
+        </p:txBody>
+      </p:sp>
+    </p:spTree>
+  </p:cSld>
+  <p:clrMapOvr>
+    <a:masterClrMapping/>
+  </p:clrMapOvr>
+</p:sld>
+</file>
+
+<file path=ppt/slides/slide36.xml><?xml version="1.0" encoding="utf-8"?>
+<p:sld xmlns:a="http://schemas.openxmlformats.org/drawingml/2006/main" xmlns:r="http://schemas.openxmlformats.org/officeDocument/2006/relationships" xmlns:p="http://schemas.openxmlformats.org/presentationml/2006/main">
+  <p:cSld>
+    <p:spTree>
+      <p:nvGrpSpPr>
+        <p:cNvPr id="1" name=""/>
+        <p:cNvGrpSpPr/>
+        <p:nvPr/>
+      </p:nvGrpSpPr>
+      <p:grpSpPr/>
+      <p:sp>
+        <p:nvSpPr>
           <p:cNvPr id="2" name="Text Box 1"/>
           <p:cNvSpPr txBox="1"/>
           <p:nvPr/>
@@ -11402,7 +11819,7 @@
 </p:sld>
 </file>
 
-<file path=ppt/slides/slide31.xml><?xml version="1.0" encoding="utf-8"?>
+<file path=ppt/slides/slide37.xml><?xml version="1.0" encoding="utf-8"?>
 <p:sld xmlns:a="http://schemas.openxmlformats.org/drawingml/2006/main" xmlns:r="http://schemas.openxmlformats.org/officeDocument/2006/relationships" xmlns:p="http://schemas.openxmlformats.org/presentationml/2006/main">
   <p:cSld>
     <p:spTree>
@@ -11460,7 +11877,7 @@
 </p:sld>
 </file>
 
-<file path=ppt/slides/slide32.xml><?xml version="1.0" encoding="utf-8"?>
+<file path=ppt/slides/slide38.xml><?xml version="1.0" encoding="utf-8"?>
 <p:sld xmlns:a="http://schemas.openxmlformats.org/drawingml/2006/main" xmlns:r="http://schemas.openxmlformats.org/officeDocument/2006/relationships" xmlns:p="http://schemas.openxmlformats.org/presentationml/2006/main">
   <p:cSld>
     <p:spTree>
@@ -11663,7 +12080,7 @@
 </p:sld>
 </file>
 
-<file path=ppt/slides/slide33.xml><?xml version="1.0" encoding="utf-8"?>
+<file path=ppt/slides/slide39.xml><?xml version="1.0" encoding="utf-8"?>
 <p:sld xmlns:a="http://schemas.openxmlformats.org/drawingml/2006/main" xmlns:r="http://schemas.openxmlformats.org/officeDocument/2006/relationships" xmlns:p="http://schemas.openxmlformats.org/presentationml/2006/main">
   <p:cSld>
     <p:spTree>
@@ -12685,7 +13102,47 @@
 </p:sld>
 </file>
 
-<file path=ppt/slides/slide34.xml><?xml version="1.0" encoding="utf-8"?>
+<file path=ppt/slides/slide4.xml><?xml version="1.0" encoding="utf-8"?>
+<p:sld xmlns:a="http://schemas.openxmlformats.org/drawingml/2006/main" xmlns:r="http://schemas.openxmlformats.org/officeDocument/2006/relationships" xmlns:p="http://schemas.openxmlformats.org/presentationml/2006/main">
+  <p:cSld>
+    <p:spTree>
+      <p:nvGrpSpPr>
+        <p:cNvPr id="1" name=""/>
+        <p:cNvGrpSpPr/>
+        <p:nvPr/>
+      </p:nvGrpSpPr>
+      <p:grpSpPr/>
+      <p:pic>
+        <p:nvPicPr>
+          <p:cNvPr id="2" name="Picture 1"/>
+          <p:cNvPicPr/>
+          <p:nvPr/>
+        </p:nvPicPr>
+        <p:blipFill>
+          <a:blip r:embed="rId1"/>
+          <a:stretch>
+            <a:fillRect/>
+          </a:stretch>
+        </p:blipFill>
+        <p:spPr>
+          <a:xfrm>
+            <a:off x="835025" y="331470"/>
+            <a:ext cx="10521950" cy="5899785"/>
+          </a:xfrm>
+          <a:prstGeom prst="rect">
+            <a:avLst/>
+          </a:prstGeom>
+        </p:spPr>
+      </p:pic>
+    </p:spTree>
+  </p:cSld>
+  <p:clrMapOvr>
+    <a:masterClrMapping/>
+  </p:clrMapOvr>
+</p:sld>
+</file>
+
+<file path=ppt/slides/slide40.xml><?xml version="1.0" encoding="utf-8"?>
 <p:sld xmlns:a="http://schemas.openxmlformats.org/drawingml/2006/main" xmlns:r="http://schemas.openxmlformats.org/officeDocument/2006/relationships" xmlns:p="http://schemas.openxmlformats.org/presentationml/2006/main">
   <p:cSld>
     <p:bg>
@@ -12837,46 +13294,6 @@
           </a:fontRef>
         </p:style>
       </p:sp>
-    </p:spTree>
-  </p:cSld>
-  <p:clrMapOvr>
-    <a:masterClrMapping/>
-  </p:clrMapOvr>
-</p:sld>
-</file>
-
-<file path=ppt/slides/slide4.xml><?xml version="1.0" encoding="utf-8"?>
-<p:sld xmlns:a="http://schemas.openxmlformats.org/drawingml/2006/main" xmlns:r="http://schemas.openxmlformats.org/officeDocument/2006/relationships" xmlns:p="http://schemas.openxmlformats.org/presentationml/2006/main">
-  <p:cSld>
-    <p:spTree>
-      <p:nvGrpSpPr>
-        <p:cNvPr id="1" name=""/>
-        <p:cNvGrpSpPr/>
-        <p:nvPr/>
-      </p:nvGrpSpPr>
-      <p:grpSpPr/>
-      <p:pic>
-        <p:nvPicPr>
-          <p:cNvPr id="2" name="Picture 1"/>
-          <p:cNvPicPr/>
-          <p:nvPr/>
-        </p:nvPicPr>
-        <p:blipFill>
-          <a:blip r:embed="rId1"/>
-          <a:stretch>
-            <a:fillRect/>
-          </a:stretch>
-        </p:blipFill>
-        <p:spPr>
-          <a:xfrm>
-            <a:off x="835025" y="331470"/>
-            <a:ext cx="10521950" cy="5899785"/>
-          </a:xfrm>
-          <a:prstGeom prst="rect">
-            <a:avLst/>
-          </a:prstGeom>
-        </p:spPr>
-      </p:pic>
     </p:spTree>
   </p:cSld>
   <p:clrMapOvr>
